--- a/ppt/water-treatment-utility.pptx
+++ b/ppt/water-treatment-utility.pptx
@@ -3101,8 +3101,8 @@
         </p:nvSpPr>
         <p:spPr>
           <a:xfrm>
-            <a:off x="11140135" y="0"/>
-            <a:ext cx="1051560" cy="6858000"/>
+            <a:off x="-91440" y="-91440"/>
+            <a:ext cx="12435840" cy="7040880"/>
           </a:xfrm>
           <a:prstGeom prst="rect">
             <a:avLst/>
@@ -3139,55 +3139,20 @@
       </p:sp>
       <p:sp>
         <p:nvSpPr>
-          <p:cNvPr id="3" name="TextBox 2"/>
-          <p:cNvSpPr txBox="1"/>
-          <p:nvPr/>
-        </p:nvSpPr>
-        <p:spPr>
-          <a:xfrm>
-            <a:off x="777240" y="2286000"/>
-            <a:ext cx="9875520" cy="1554480"/>
-          </a:xfrm>
-          <a:prstGeom prst="rect">
-            <a:avLst/>
-          </a:prstGeom>
-          <a:noFill/>
-        </p:spPr>
-        <p:txBody>
-          <a:bodyPr wrap="square" anchor="t">
-            <a:spAutoFit/>
-          </a:bodyPr>
-          <a:lstStyle/>
-          <a:p>
-            <a:pPr algn="l"/>
-            <a:r>
-              <a:rPr sz="3100" b="1">
-                <a:solidFill>
-                  <a:srgbClr val="2B6CA3"/>
-                </a:solidFill>
-                <a:latin typeface="Georgia"/>
-              </a:rPr>
-              <a:t>Water Treatment Utility Monitoring</a:t>
-            </a:r>
-          </a:p>
-        </p:txBody>
-      </p:sp>
-      <p:sp>
-        <p:nvSpPr>
-          <p:cNvPr id="4" name="Rectangle 3"/>
+          <p:cNvPr id="3" name="Rectangle 2"/>
           <p:cNvSpPr/>
           <p:nvPr/>
         </p:nvSpPr>
         <p:spPr>
           <a:xfrm>
-            <a:off x="804672" y="3703320"/>
-            <a:ext cx="3291840" cy="45720"/>
+            <a:off x="0" y="0"/>
+            <a:ext cx="4297680" cy="6858000"/>
           </a:xfrm>
           <a:prstGeom prst="rect">
             <a:avLst/>
           </a:prstGeom>
           <a:solidFill>
-            <a:srgbClr val="2B6CA3"/>
+            <a:srgbClr val="1E4B72"/>
           </a:solidFill>
           <a:ln>
             <a:noFill/>
@@ -3218,14 +3183,58 @@
       </p:sp>
       <p:sp>
         <p:nvSpPr>
+          <p:cNvPr id="4" name="Oval 3"/>
+          <p:cNvSpPr/>
+          <p:nvPr/>
+        </p:nvSpPr>
+        <p:spPr>
+          <a:xfrm>
+            <a:off x="1463040" y="1325880"/>
+            <a:ext cx="1371600" cy="1371600"/>
+          </a:xfrm>
+          <a:prstGeom prst="ellipse">
+            <a:avLst/>
+          </a:prstGeom>
+          <a:solidFill>
+            <a:srgbClr val="FFFFFF"/>
+          </a:solidFill>
+          <a:ln>
+            <a:noFill/>
+          </a:ln>
+          <a:effectLst/>
+        </p:spPr>
+        <p:style>
+          <a:lnRef idx="1">
+            <a:schemeClr val="accent1"/>
+          </a:lnRef>
+          <a:fillRef idx="3">
+            <a:schemeClr val="accent1"/>
+          </a:fillRef>
+          <a:effectRef idx="2">
+            <a:schemeClr val="accent1"/>
+          </a:effectRef>
+          <a:fontRef idx="minor">
+            <a:schemeClr val="lt1"/>
+          </a:fontRef>
+        </p:style>
+        <p:txBody>
+          <a:bodyPr rtlCol="0" anchor="ctr"/>
+          <a:lstStyle/>
+          <a:p>
+            <a:pPr algn="ctr"/>
+          </a:p>
+        </p:txBody>
+      </p:sp>
+      <p:sp>
+        <p:nvSpPr>
           <p:cNvPr id="5" name="TextBox 4"/>
           <p:cNvSpPr txBox="1"/>
           <p:nvPr/>
         </p:nvSpPr>
         <p:spPr>
           <a:xfrm>
-            <a:off x="804672" y="3931920"/>
-            <a:ext cx="9692640" cy="2194560"/>
+            <a:off x="1463040" y="1325880"/>
+            <a:ext cx="1371600" cy="1371600"/>
           </a:xfrm>
           <a:prstGeom prst="rect">
             <a:avLst/>
@@ -3233,6 +3242,41 @@
           <a:noFill/>
         </p:spPr>
         <p:txBody>
+          <a:bodyPr wrap="none" anchor="ctr">
+            <a:spAutoFit/>
+          </a:bodyPr>
+          <a:lstStyle/>
+          <a:p>
+            <a:pPr algn="ctr"/>
+            <a:r>
+              <a:rPr sz="4500" b="1">
+                <a:solidFill>
+                  <a:srgbClr val="1E4B72"/>
+                </a:solidFill>
+                <a:latin typeface="Georgia"/>
+              </a:rPr>
+              <a:t>WT</a:t>
+            </a:r>
+          </a:p>
+        </p:txBody>
+      </p:sp>
+      <p:sp>
+        <p:nvSpPr>
+          <p:cNvPr id="6" name="TextBox 5"/>
+          <p:cNvSpPr txBox="1"/>
+          <p:nvPr/>
+        </p:nvSpPr>
+        <p:spPr>
+          <a:xfrm>
+            <a:off x="457200" y="3108960"/>
+            <a:ext cx="3383280" cy="2743200"/>
+          </a:xfrm>
+          <a:prstGeom prst="rect">
+            <a:avLst/>
+          </a:prstGeom>
+          <a:noFill/>
+        </p:spPr>
+        <p:txBody>
           <a:bodyPr wrap="square" anchor="t">
             <a:spAutoFit/>
           </a:bodyPr>
@@ -3240,33 +3284,79 @@
           <a:p>
             <a:pPr algn="l"/>
             <a:r>
-              <a:rPr sz="1800" b="0">
-                <a:solidFill>
-                  <a:srgbClr val="5C655F"/>
+              <a:rPr sz="1500" b="0" i="1">
+                <a:solidFill>
+                  <a:srgbClr val="DFE8F1"/>
                 </a:solidFill>
                 <a:latin typeface="Cambria"/>
               </a:rPr>
               <a:t>Two plants; turbidity, pH, chlorine, flow, pressure; edge decisions in seconds</a:t>
             </a:r>
           </a:p>
+        </p:txBody>
+      </p:sp>
+      <p:sp>
+        <p:nvSpPr>
+          <p:cNvPr id="7" name="TextBox 6"/>
+          <p:cNvSpPr txBox="1"/>
+          <p:nvPr/>
+        </p:nvSpPr>
+        <p:spPr>
+          <a:xfrm>
+            <a:off x="4754880" y="1737360"/>
+            <a:ext cx="7040880" cy="2194560"/>
+          </a:xfrm>
+          <a:prstGeom prst="rect">
+            <a:avLst/>
+          </a:prstGeom>
+          <a:noFill/>
+        </p:spPr>
+        <p:txBody>
+          <a:bodyPr wrap="square" anchor="ctr">
+            <a:spAutoFit/>
+          </a:bodyPr>
+          <a:lstStyle/>
           <a:p>
             <a:pPr algn="l"/>
             <a:r>
-              <a:rPr sz="1600" b="1">
-                <a:solidFill>
-                  <a:srgbClr val="232A26"/>
-                </a:solidFill>
-                <a:latin typeface="Cambria"/>
+              <a:rPr sz="3200" b="1" i="0">
+                <a:solidFill>
+                  <a:srgbClr val="FFFFFF"/>
+                </a:solidFill>
+                <a:latin typeface="Georgia"/>
               </a:rPr>
-              <a:t/>
-            </a:r>
-          </a:p>
+              <a:t>Water Treatment Utility Monitoring</a:t>
+            </a:r>
+          </a:p>
+        </p:txBody>
+      </p:sp>
+      <p:sp>
+        <p:nvSpPr>
+          <p:cNvPr id="8" name="TextBox 7"/>
+          <p:cNvSpPr txBox="1"/>
+          <p:nvPr/>
+        </p:nvSpPr>
+        <p:spPr>
+          <a:xfrm>
+            <a:off x="4754880" y="4297680"/>
+            <a:ext cx="6858000" cy="1645920"/>
+          </a:xfrm>
+          <a:prstGeom prst="rect">
+            <a:avLst/>
+          </a:prstGeom>
+          <a:noFill/>
+        </p:spPr>
+        <p:txBody>
+          <a:bodyPr wrap="square" anchor="t">
+            <a:spAutoFit/>
+          </a:bodyPr>
+          <a:lstStyle/>
           <a:p>
             <a:pPr algn="l"/>
             <a:r>
-              <a:rPr sz="1300" b="0">
-                <a:solidFill>
-                  <a:srgbClr val="5C655F"/>
+              <a:rPr sz="1250" b="0" i="0">
+                <a:solidFill>
+                  <a:srgbClr val="BFD2E3"/>
                 </a:solidFill>
                 <a:latin typeface="Cambria"/>
               </a:rPr>
@@ -3276,9 +3366,9 @@
           <a:p>
             <a:pPr algn="l"/>
             <a:r>
-              <a:rPr sz="1300" b="0">
-                <a:solidFill>
-                  <a:srgbClr val="5C655F"/>
+              <a:rPr sz="1250" b="0" i="0">
+                <a:solidFill>
+                  <a:srgbClr val="BFD2E3"/>
                 </a:solidFill>
                 <a:latin typeface="Cambria"/>
               </a:rPr>
@@ -3541,7 +3631,7 @@
           <a:p>
             <a:pPr algn="ctr"/>
             <a:r>
-              <a:rPr sz="2600" b="1">
+              <a:rPr sz="2600" b="1" i="0">
                 <a:solidFill>
                   <a:srgbClr val="FFFFFF"/>
                 </a:solidFill>
@@ -3882,7 +3972,7 @@
           <a:p>
             <a:pPr algn="ctr"/>
             <a:r>
-              <a:rPr sz="2600" b="1">
+              <a:rPr sz="2600" b="1" i="0">
                 <a:solidFill>
                   <a:srgbClr val="FFFFFF"/>
                 </a:solidFill>
@@ -4143,7 +4233,7 @@
           <a:p>
             <a:pPr algn="ctr"/>
             <a:r>
-              <a:rPr sz="2600" b="1">
+              <a:rPr sz="2600" b="1" i="0">
                 <a:solidFill>
                   <a:srgbClr val="FFFFFF"/>
                 </a:solidFill>
@@ -4492,7 +4582,7 @@
           <a:p>
             <a:pPr algn="ctr"/>
             <a:r>
-              <a:rPr sz="2600" b="1">
+              <a:rPr sz="2600" b="1" i="0">
                 <a:solidFill>
                   <a:srgbClr val="FFFFFF"/>
                 </a:solidFill>
@@ -4769,7 +4859,7 @@
           <a:p>
             <a:pPr algn="ctr"/>
             <a:r>
-              <a:rPr sz="2600" b="1">
+              <a:rPr sz="2600" b="1" i="0">
                 <a:solidFill>
                   <a:srgbClr val="FFFFFF"/>
                 </a:solidFill>

--- a/ppt/water-treatment-utility.pptx
+++ b/ppt/water-treatment-utility.pptx
@@ -3183,58 +3183,14 @@
       </p:sp>
       <p:sp>
         <p:nvSpPr>
-          <p:cNvPr id="4" name="Oval 3"/>
-          <p:cNvSpPr/>
-          <p:nvPr/>
-        </p:nvSpPr>
-        <p:spPr>
-          <a:xfrm>
-            <a:off x="1463040" y="1325880"/>
-            <a:ext cx="1371600" cy="1371600"/>
-          </a:xfrm>
-          <a:prstGeom prst="ellipse">
-            <a:avLst/>
-          </a:prstGeom>
-          <a:solidFill>
-            <a:srgbClr val="FFFFFF"/>
-          </a:solidFill>
-          <a:ln>
-            <a:noFill/>
-          </a:ln>
-          <a:effectLst/>
-        </p:spPr>
-        <p:style>
-          <a:lnRef idx="1">
-            <a:schemeClr val="accent1"/>
-          </a:lnRef>
-          <a:fillRef idx="3">
-            <a:schemeClr val="accent1"/>
-          </a:fillRef>
-          <a:effectRef idx="2">
-            <a:schemeClr val="accent1"/>
-          </a:effectRef>
-          <a:fontRef idx="minor">
-            <a:schemeClr val="lt1"/>
-          </a:fontRef>
-        </p:style>
-        <p:txBody>
-          <a:bodyPr rtlCol="0" anchor="ctr"/>
-          <a:lstStyle/>
-          <a:p>
-            <a:pPr algn="ctr"/>
-          </a:p>
-        </p:txBody>
-      </p:sp>
-      <p:sp>
-        <p:nvSpPr>
-          <p:cNvPr id="5" name="TextBox 4"/>
+          <p:cNvPr id="4" name="TextBox 3"/>
           <p:cNvSpPr txBox="1"/>
           <p:nvPr/>
         </p:nvSpPr>
         <p:spPr>
           <a:xfrm>
-            <a:off x="1463040" y="1325880"/>
-            <a:ext cx="1371600" cy="1371600"/>
+            <a:off x="457200" y="1920240"/>
+            <a:ext cx="3383280" cy="3017520"/>
           </a:xfrm>
           <a:prstGeom prst="rect">
             <a:avLst/>
@@ -3242,34 +3198,34 @@
           <a:noFill/>
         </p:spPr>
         <p:txBody>
-          <a:bodyPr wrap="none" anchor="ctr">
+          <a:bodyPr wrap="square" anchor="ctr">
             <a:spAutoFit/>
           </a:bodyPr>
           <a:lstStyle/>
           <a:p>
-            <a:pPr algn="ctr"/>
-            <a:r>
-              <a:rPr sz="4500" b="1">
-                <a:solidFill>
-                  <a:srgbClr val="1E4B72"/>
-                </a:solidFill>
-                <a:latin typeface="Georgia"/>
+            <a:pPr algn="l"/>
+            <a:r>
+              <a:rPr sz="1600" b="0" i="1">
+                <a:solidFill>
+                  <a:srgbClr val="DFE8F1"/>
+                </a:solidFill>
+                <a:latin typeface="Cambria"/>
               </a:rPr>
-              <a:t>WT</a:t>
-            </a:r>
-          </a:p>
-        </p:txBody>
-      </p:sp>
-      <p:sp>
-        <p:nvSpPr>
-          <p:cNvPr id="6" name="TextBox 5"/>
+              <a:t>Two plants; turbidity, pH, chlorine, flow, pressure; edge decisions in seconds</a:t>
+            </a:r>
+          </a:p>
+        </p:txBody>
+      </p:sp>
+      <p:sp>
+        <p:nvSpPr>
+          <p:cNvPr id="5" name="TextBox 4"/>
           <p:cNvSpPr txBox="1"/>
           <p:nvPr/>
         </p:nvSpPr>
         <p:spPr>
           <a:xfrm>
-            <a:off x="457200" y="3108960"/>
-            <a:ext cx="3383280" cy="2743200"/>
+            <a:off x="4754880" y="1783080"/>
+            <a:ext cx="7040880" cy="2377440"/>
           </a:xfrm>
           <a:prstGeom prst="rect">
             <a:avLst/>
@@ -3277,41 +3233,6 @@
           <a:noFill/>
         </p:spPr>
         <p:txBody>
-          <a:bodyPr wrap="square" anchor="t">
-            <a:spAutoFit/>
-          </a:bodyPr>
-          <a:lstStyle/>
-          <a:p>
-            <a:pPr algn="l"/>
-            <a:r>
-              <a:rPr sz="1500" b="0" i="1">
-                <a:solidFill>
-                  <a:srgbClr val="DFE8F1"/>
-                </a:solidFill>
-                <a:latin typeface="Cambria"/>
-              </a:rPr>
-              <a:t>Two plants; turbidity, pH, chlorine, flow, pressure; edge decisions in seconds</a:t>
-            </a:r>
-          </a:p>
-        </p:txBody>
-      </p:sp>
-      <p:sp>
-        <p:nvSpPr>
-          <p:cNvPr id="7" name="TextBox 6"/>
-          <p:cNvSpPr txBox="1"/>
-          <p:nvPr/>
-        </p:nvSpPr>
-        <p:spPr>
-          <a:xfrm>
-            <a:off x="4754880" y="1737360"/>
-            <a:ext cx="7040880" cy="2194560"/>
-          </a:xfrm>
-          <a:prstGeom prst="rect">
-            <a:avLst/>
-          </a:prstGeom>
-          <a:noFill/>
-        </p:spPr>
-        <p:txBody>
           <a:bodyPr wrap="square" anchor="ctr">
             <a:spAutoFit/>
           </a:bodyPr>
@@ -3332,13 +3253,13 @@
       </p:sp>
       <p:sp>
         <p:nvSpPr>
-          <p:cNvPr id="8" name="TextBox 7"/>
+          <p:cNvPr id="6" name="TextBox 5"/>
           <p:cNvSpPr txBox="1"/>
           <p:nvPr/>
         </p:nvSpPr>
         <p:spPr>
           <a:xfrm>
-            <a:off x="4754880" y="4297680"/>
+            <a:off x="4754880" y="4434840"/>
             <a:ext cx="6858000" cy="1645920"/>
           </a:xfrm>
           <a:prstGeom prst="rect">

--- a/ppt/water-treatment-utility.pptx
+++ b/ppt/water-treatment-utility.pptx
@@ -3328,8 +3328,8 @@
         </p:nvSpPr>
         <p:spPr>
           <a:xfrm>
-            <a:off x="640080" y="457200"/>
-            <a:ext cx="9311335" cy="868680"/>
+            <a:off x="640080" y="384048"/>
+            <a:ext cx="10972800" cy="868680"/>
           </a:xfrm>
         </p:spPr>
         <p:txBody>
@@ -3361,8 +3361,8 @@
         </p:nvSpPr>
         <p:spPr>
           <a:xfrm>
-            <a:off x="658368" y="1508760"/>
-            <a:ext cx="9402775" cy="4846320"/>
+            <a:off x="658368" y="1481328"/>
+            <a:ext cx="10972800" cy="4846320"/>
           </a:xfrm>
         </p:spPr>
         <p:txBody>
@@ -3492,8 +3492,8 @@
         </p:nvSpPr>
         <p:spPr>
           <a:xfrm>
-            <a:off x="11140135" y="0"/>
-            <a:ext cx="1051560" cy="6858000"/>
+            <a:off x="658368" y="1261872"/>
+            <a:ext cx="3108960" cy="36576"/>
           </a:xfrm>
           <a:prstGeom prst="rect">
             <a:avLst/>
@@ -3528,51 +3528,234 @@
           </a:p>
         </p:txBody>
       </p:sp>
-      <p:sp>
-        <p:nvSpPr>
-          <p:cNvPr id="5" name="TextBox 4"/>
-          <p:cNvSpPr txBox="1"/>
-          <p:nvPr/>
+    </p:spTree>
+  </p:cSld>
+  <p:clrMapOvr>
+    <a:masterClrMapping/>
+  </p:clrMapOvr>
+</p:sld>
+</file>
+
+<file path=ppt/slides/slide3.xml><?xml version="1.0" encoding="utf-8"?>
+<p:sld xmlns:a="http://schemas.openxmlformats.org/drawingml/2006/main" xmlns:p="http://schemas.openxmlformats.org/presentationml/2006/main" xmlns:r="http://schemas.openxmlformats.org/officeDocument/2006/relationships">
+  <p:cSld>
+    <p:spTree>
+      <p:nvGrpSpPr>
+        <p:cNvPr id="1" name=""/>
+        <p:cNvGrpSpPr/>
+        <p:nvPr/>
+      </p:nvGrpSpPr>
+      <p:grpSpPr/>
+      <p:sp>
+        <p:nvSpPr>
+          <p:cNvPr id="2" name="Title 1"/>
+          <p:cNvSpPr>
+            <a:spLocks noGrp="1"/>
+          </p:cNvSpPr>
+          <p:nvPr>
+            <p:ph type="title"/>
+          </p:nvPr>
         </p:nvSpPr>
         <p:spPr>
           <a:xfrm>
-            <a:off x="11140135" y="320040"/>
-            <a:ext cx="1051560" cy="914400"/>
+            <a:off x="640080" y="384048"/>
+            <a:ext cx="10972800" cy="868680"/>
           </a:xfrm>
-          <a:prstGeom prst="rect">
-            <a:avLst/>
-          </a:prstGeom>
-          <a:noFill/>
         </p:spPr>
         <p:txBody>
-          <a:bodyPr wrap="square" anchor="t">
-            <a:spAutoFit/>
-          </a:bodyPr>
-          <a:lstStyle/>
-          <a:p>
-            <a:pPr algn="ctr"/>
-            <a:r>
-              <a:rPr sz="2600" b="1" i="0">
-                <a:solidFill>
-                  <a:srgbClr val="FFFFFF"/>
+          <a:bodyPr wrap="square" anchor="t"/>
+          <a:lstStyle/>
+          <a:p>
+            <a:pPr algn="l"/>
+            <a:r>
+              <a:rPr b="1" sz="2700">
+                <a:solidFill>
+                  <a:srgbClr val="2B6CA3"/>
                 </a:solidFill>
                 <a:latin typeface="Georgia"/>
               </a:rPr>
-              <a:t>1</a:t>
-            </a:r>
-          </a:p>
-        </p:txBody>
-      </p:sp>
-      <p:sp>
-        <p:nvSpPr>
-          <p:cNvPr id="6" name="Rectangle 5"/>
+              <a:t>How it works: intake to dashboard</a:t>
+            </a:r>
+          </a:p>
+        </p:txBody>
+      </p:sp>
+      <p:sp>
+        <p:nvSpPr>
+          <p:cNvPr id="3" name="Content Placeholder 2"/>
+          <p:cNvSpPr>
+            <a:spLocks noGrp="1"/>
+          </p:cNvSpPr>
+          <p:nvPr>
+            <p:ph idx="1"/>
+          </p:nvPr>
+        </p:nvSpPr>
+        <p:spPr>
+          <a:xfrm>
+            <a:off x="658368" y="1481328"/>
+            <a:ext cx="10972800" cy="4846320"/>
+          </a:xfrm>
+        </p:spPr>
+        <p:txBody>
+          <a:bodyPr wrap="square">
+            <a:normAutofit/>
+          </a:bodyPr>
+          <a:lstStyle/>
+          <a:p>
+            <a:pPr>
+              <a:spcAft>
+                <a:spcPts val="600"/>
+              </a:spcAft>
+            </a:pPr>
+            <a:r>
+              <a:rPr sz="1500" b="1">
+                <a:solidFill>
+                  <a:srgbClr val="2B6CA3"/>
+                </a:solidFill>
+                <a:latin typeface="Cambria"/>
+              </a:rPr>
+              <a:t>At the plant, edge:</a:t>
+            </a:r>
+          </a:p>
+          <a:p>
+            <a:pPr lvl="1">
+              <a:spcAft>
+                <a:spcPts val="600"/>
+              </a:spcAft>
+            </a:pPr>
+            <a:r>
+              <a:rPr sz="1300" b="0">
+                <a:solidFill>
+                  <a:srgbClr val="232A26"/>
+                </a:solidFill>
+                <a:latin typeface="Cambria"/>
+              </a:rPr>
+              <a:t>Sensors: 10 field sensors across 2 plants.</a:t>
+            </a:r>
+          </a:p>
+          <a:p>
+            <a:pPr lvl="1">
+              <a:spcAft>
+                <a:spcPts val="600"/>
+              </a:spcAft>
+            </a:pPr>
+            <a:r>
+              <a:rPr sz="1300" b="0">
+                <a:solidFill>
+                  <a:srgbClr val="232A26"/>
+                </a:solidFill>
+                <a:latin typeface="Cambria"/>
+              </a:rPr>
+              <a:t>Fog node: 10-second windows, aggregate, alert gates.</a:t>
+            </a:r>
+          </a:p>
+          <a:p>
+            <a:pPr>
+              <a:spcAft>
+                <a:spcPts val="600"/>
+              </a:spcAft>
+            </a:pPr>
+            <a:r>
+              <a:rPr sz="1500" b="1">
+                <a:solidFill>
+                  <a:srgbClr val="2B6CA3"/>
+                </a:solidFill>
+                <a:latin typeface="Cambria"/>
+              </a:rPr>
+              <a:t>AWS cloud:</a:t>
+            </a:r>
+          </a:p>
+          <a:p>
+            <a:pPr lvl="1">
+              <a:spcAft>
+                <a:spcPts val="600"/>
+              </a:spcAft>
+            </a:pPr>
+            <a:r>
+              <a:rPr sz="1300" b="0">
+                <a:solidFill>
+                  <a:srgbClr val="232A26"/>
+                </a:solidFill>
+                <a:latin typeface="Cambria"/>
+              </a:rPr>
+              <a:t>Amazon SQS: one summary per window, batched.</a:t>
+            </a:r>
+          </a:p>
+          <a:p>
+            <a:pPr lvl="1">
+              <a:spcAft>
+                <a:spcPts val="600"/>
+              </a:spcAft>
+            </a:pPr>
+            <a:r>
+              <a:rPr sz="1300" b="0">
+                <a:solidFill>
+                  <a:srgbClr val="232A26"/>
+                </a:solidFill>
+                <a:latin typeface="Cambria"/>
+              </a:rPr>
+              <a:t>AWS Lambda: serverless ingest of each summary.</a:t>
+            </a:r>
+          </a:p>
+          <a:p>
+            <a:pPr lvl="1">
+              <a:spcAft>
+                <a:spcPts val="600"/>
+              </a:spcAft>
+            </a:pPr>
+            <a:r>
+              <a:rPr sz="1300" b="0">
+                <a:solidFill>
+                  <a:srgbClr val="232A26"/>
+                </a:solidFill>
+                <a:latin typeface="Cambria"/>
+              </a:rPr>
+              <a:t>DynamoDB: time-series store of every window.</a:t>
+            </a:r>
+          </a:p>
+          <a:p>
+            <a:pPr lvl="1">
+              <a:spcAft>
+                <a:spcPts val="600"/>
+              </a:spcAft>
+            </a:pPr>
+            <a:r>
+              <a:rPr sz="1300" b="0">
+                <a:solidFill>
+                  <a:srgbClr val="232A26"/>
+                </a:solidFill>
+                <a:latin typeface="Cambria"/>
+              </a:rPr>
+              <a:t>Live dashboard: served via S3 and API Gateway.</a:t>
+            </a:r>
+          </a:p>
+          <a:p>
+            <a:pPr>
+              <a:spcAft>
+                <a:spcPts val="600"/>
+              </a:spcAft>
+            </a:pPr>
+            <a:r>
+              <a:rPr sz="1500" b="0">
+                <a:solidFill>
+                  <a:srgbClr val="232A26"/>
+                </a:solidFill>
+                <a:latin typeface="Cambria"/>
+              </a:rPr>
+              <a:t>Verified end to end locally with Docker and an AWS emulator, and the same AWS SDK code deploys to real AWS in a single scripted step.</a:t>
+            </a:r>
+          </a:p>
+        </p:txBody>
+      </p:sp>
+      <p:sp>
+        <p:nvSpPr>
+          <p:cNvPr id="4" name="Rectangle 3"/>
           <p:cNvSpPr/>
           <p:nvPr/>
         </p:nvSpPr>
         <p:spPr>
           <a:xfrm>
-            <a:off x="658368" y="1325880"/>
-            <a:ext cx="2926080" cy="36576"/>
+            <a:off x="658368" y="1261872"/>
+            <a:ext cx="3108960" cy="36576"/>
           </a:xfrm>
           <a:prstGeom prst="rect">
             <a:avLst/>
@@ -3615,7 +3798,7 @@
 </p:sld>
 </file>
 
-<file path=ppt/slides/slide3.xml><?xml version="1.0" encoding="utf-8"?>
+<file path=ppt/slides/slide4.xml><?xml version="1.0" encoding="utf-8"?>
 <p:sld xmlns:a="http://schemas.openxmlformats.org/drawingml/2006/main" xmlns:p="http://schemas.openxmlformats.org/presentationml/2006/main" xmlns:r="http://schemas.openxmlformats.org/officeDocument/2006/relationships">
   <p:cSld>
     <p:spTree>
@@ -3637,8 +3820,8 @@
         </p:nvSpPr>
         <p:spPr>
           <a:xfrm>
-            <a:off x="640080" y="457200"/>
-            <a:ext cx="9311335" cy="868680"/>
+            <a:off x="640080" y="384048"/>
+            <a:ext cx="10972800" cy="868680"/>
           </a:xfrm>
         </p:spPr>
         <p:txBody>
@@ -3653,7 +3836,7 @@
                 </a:solidFill>
                 <a:latin typeface="Georgia"/>
               </a:rPr>
-              <a:t>How it works: intake to dashboard</a:t>
+              <a:t>Demonstration highlights</a:t>
             </a:r>
           </a:p>
         </p:txBody>
@@ -3670,8 +3853,8 @@
         </p:nvSpPr>
         <p:spPr>
           <a:xfrm>
-            <a:off x="658368" y="1508760"/>
-            <a:ext cx="9402775" cy="4846320"/>
+            <a:off x="658368" y="1481328"/>
+            <a:ext cx="5760720" cy="4754880"/>
           </a:xfrm>
         </p:spPr>
         <p:txBody>
@@ -3682,145 +3865,65 @@
           <a:p>
             <a:pPr>
               <a:spcAft>
-                <a:spcPts val="600"/>
+                <a:spcPts val="800"/>
               </a:spcAft>
             </a:pPr>
             <a:r>
-              <a:rPr sz="1500" b="1">
-                <a:solidFill>
-                  <a:srgbClr val="2B6CA3"/>
+              <a:rPr sz="1500" b="0">
+                <a:solidFill>
+                  <a:srgbClr val="232A26"/>
                 </a:solidFill>
                 <a:latin typeface="Cambria"/>
               </a:rPr>
-              <a:t>At the plant, edge:</a:t>
-            </a:r>
-          </a:p>
-          <a:p>
-            <a:pPr lvl="1">
+              <a:t>Dashboard during the end-to-end local run: reading-by-plant matrix, compliance strips, cross-plant trends.</a:t>
+            </a:r>
+          </a:p>
+          <a:p>
+            <a:pPr>
               <a:spcAft>
-                <a:spcPts val="600"/>
+                <a:spcPts val="800"/>
               </a:spcAft>
             </a:pPr>
             <a:r>
-              <a:rPr sz="1300" b="0">
+              <a:rPr sz="1500" b="0">
                 <a:solidFill>
                   <a:srgbClr val="232A26"/>
                 </a:solidFill>
                 <a:latin typeface="Cambria"/>
               </a:rPr>
-              <a:t>Sensors: 10 field sensors across 2 plants.</a:t>
-            </a:r>
-          </a:p>
-          <a:p>
-            <a:pPr lvl="1">
+              <a:t>4 / 4 pipeline health checks green: gateway, queue, Lambda, and end-to-end pipeline.</a:t>
+            </a:r>
+          </a:p>
+          <a:p>
+            <a:pPr>
               <a:spcAft>
-                <a:spcPts val="600"/>
+                <a:spcPts val="800"/>
               </a:spcAft>
             </a:pPr>
             <a:r>
-              <a:rPr sz="1300" b="0">
+              <a:rPr sz="1500" b="0">
                 <a:solidFill>
                   <a:srgbClr val="232A26"/>
                 </a:solidFill>
                 <a:latin typeface="Cambria"/>
               </a:rPr>
-              <a:t>Fog node: 10-second windows, aggregate, alert gates.</a:t>
+              <a:t>107 automated tests pass across sensors, fog, processor and dashboard.</a:t>
             </a:r>
           </a:p>
           <a:p>
             <a:pPr>
               <a:spcAft>
-                <a:spcPts val="600"/>
+                <a:spcPts val="800"/>
               </a:spcAft>
             </a:pPr>
             <a:r>
-              <a:rPr sz="1500" b="1">
-                <a:solidFill>
-                  <a:srgbClr val="2B6CA3"/>
+              <a:rPr sz="1500" b="0">
+                <a:solidFill>
+                  <a:srgbClr val="232A26"/>
                 </a:solidFill>
                 <a:latin typeface="Cambria"/>
               </a:rPr>
-              <a:t>AWS cloud:</a:t>
-            </a:r>
-          </a:p>
-          <a:p>
-            <a:pPr lvl="1">
-              <a:spcAft>
-                <a:spcPts val="600"/>
-              </a:spcAft>
-            </a:pPr>
-            <a:r>
-              <a:rPr sz="1300" b="0">
-                <a:solidFill>
-                  <a:srgbClr val="232A26"/>
-                </a:solidFill>
-                <a:latin typeface="Cambria"/>
-              </a:rPr>
-              <a:t>Amazon SQS: one summary per window, batched.</a:t>
-            </a:r>
-          </a:p>
-          <a:p>
-            <a:pPr lvl="1">
-              <a:spcAft>
-                <a:spcPts val="600"/>
-              </a:spcAft>
-            </a:pPr>
-            <a:r>
-              <a:rPr sz="1300" b="0">
-                <a:solidFill>
-                  <a:srgbClr val="232A26"/>
-                </a:solidFill>
-                <a:latin typeface="Cambria"/>
-              </a:rPr>
-              <a:t>AWS Lambda: serverless ingest of each summary.</a:t>
-            </a:r>
-          </a:p>
-          <a:p>
-            <a:pPr lvl="1">
-              <a:spcAft>
-                <a:spcPts val="600"/>
-              </a:spcAft>
-            </a:pPr>
-            <a:r>
-              <a:rPr sz="1300" b="0">
-                <a:solidFill>
-                  <a:srgbClr val="232A26"/>
-                </a:solidFill>
-                <a:latin typeface="Cambria"/>
-              </a:rPr>
-              <a:t>DynamoDB: time-series store of every window.</a:t>
-            </a:r>
-          </a:p>
-          <a:p>
-            <a:pPr lvl="1">
-              <a:spcAft>
-                <a:spcPts val="600"/>
-              </a:spcAft>
-            </a:pPr>
-            <a:r>
-              <a:rPr sz="1300" b="0">
-                <a:solidFill>
-                  <a:srgbClr val="232A26"/>
-                </a:solidFill>
-                <a:latin typeface="Cambria"/>
-              </a:rPr>
-              <a:t>Live dashboard: served via S3 and API Gateway.</a:t>
-            </a:r>
-          </a:p>
-          <a:p>
-            <a:pPr>
-              <a:spcAft>
-                <a:spcPts val="600"/>
-              </a:spcAft>
-            </a:pPr>
-            <a:r>
-              <a:rPr sz="1500" b="0">
-                <a:solidFill>
-                  <a:srgbClr val="232A26"/>
-                </a:solidFill>
-                <a:latin typeface="Cambria"/>
-              </a:rPr>
-              <a:t>Verified end to end locally with Docker and an AWS emulator, and the same AWS SDK code deploys to real AWS in a single scripted step.</a:t>
+              <a:t>2,000 message burst absorbed by the queue and drained by the consumer.</a:t>
             </a:r>
           </a:p>
         </p:txBody>
@@ -3833,8 +3936,8 @@
         </p:nvSpPr>
         <p:spPr>
           <a:xfrm>
-            <a:off x="11140135" y="0"/>
-            <a:ext cx="1051560" cy="6858000"/>
+            <a:off x="658368" y="1261872"/>
+            <a:ext cx="3108960" cy="36576"/>
           </a:xfrm>
           <a:prstGeom prst="rect">
             <a:avLst/>
@@ -3869,51 +3972,242 @@
           </a:p>
         </p:txBody>
       </p:sp>
-      <p:sp>
-        <p:nvSpPr>
-          <p:cNvPr id="5" name="TextBox 4"/>
-          <p:cNvSpPr txBox="1"/>
+      <p:pic>
+        <p:nvPicPr>
+          <p:cNvPr id="5" name="Picture 4" descr="dashboard-desktop.png"/>
+          <p:cNvPicPr>
+            <a:picLocks noChangeAspect="1"/>
+          </p:cNvPicPr>
           <p:nvPr/>
-        </p:nvSpPr>
+        </p:nvPicPr>
+        <p:blipFill>
+          <a:blip r:embed="rId2"/>
+          <a:stretch>
+            <a:fillRect/>
+          </a:stretch>
+        </p:blipFill>
         <p:spPr>
           <a:xfrm>
-            <a:off x="11140135" y="320040"/>
-            <a:ext cx="1051560" cy="914400"/>
+            <a:off x="6629400" y="2003679"/>
+            <a:ext cx="5120640" cy="3600449"/>
           </a:xfrm>
           <a:prstGeom prst="rect">
             <a:avLst/>
           </a:prstGeom>
-          <a:noFill/>
         </p:spPr>
-        <p:txBody>
-          <a:bodyPr wrap="square" anchor="t">
-            <a:spAutoFit/>
-          </a:bodyPr>
-          <a:lstStyle/>
-          <a:p>
-            <a:pPr algn="ctr"/>
-            <a:r>
-              <a:rPr sz="2600" b="1" i="0">
-                <a:solidFill>
-                  <a:srgbClr val="FFFFFF"/>
+      </p:pic>
+    </p:spTree>
+  </p:cSld>
+  <p:clrMapOvr>
+    <a:masterClrMapping/>
+  </p:clrMapOvr>
+</p:sld>
+</file>
+
+<file path=ppt/slides/slide5.xml><?xml version="1.0" encoding="utf-8"?>
+<p:sld xmlns:a="http://schemas.openxmlformats.org/drawingml/2006/main" xmlns:p="http://schemas.openxmlformats.org/presentationml/2006/main" xmlns:r="http://schemas.openxmlformats.org/officeDocument/2006/relationships">
+  <p:cSld>
+    <p:spTree>
+      <p:nvGrpSpPr>
+        <p:cNvPr id="1" name=""/>
+        <p:cNvGrpSpPr/>
+        <p:nvPr/>
+      </p:nvGrpSpPr>
+      <p:grpSpPr/>
+      <p:sp>
+        <p:nvSpPr>
+          <p:cNvPr id="2" name="Title 1"/>
+          <p:cNvSpPr>
+            <a:spLocks noGrp="1"/>
+          </p:cNvSpPr>
+          <p:nvPr>
+            <p:ph type="title"/>
+          </p:nvPr>
+        </p:nvSpPr>
+        <p:spPr>
+          <a:xfrm>
+            <a:off x="640080" y="384048"/>
+            <a:ext cx="10972800" cy="868680"/>
+          </a:xfrm>
+        </p:spPr>
+        <p:txBody>
+          <a:bodyPr wrap="square" anchor="t"/>
+          <a:lstStyle/>
+          <a:p>
+            <a:pPr algn="l"/>
+            <a:r>
+              <a:rPr b="1" sz="2700">
+                <a:solidFill>
+                  <a:srgbClr val="2B6CA3"/>
                 </a:solidFill>
                 <a:latin typeface="Georgia"/>
               </a:rPr>
-              <a:t>2</a:t>
-            </a:r>
-          </a:p>
-        </p:txBody>
-      </p:sp>
-      <p:sp>
-        <p:nvSpPr>
-          <p:cNvPr id="6" name="Rectangle 5"/>
+              <a:t>The hardest part: burst survival</a:t>
+            </a:r>
+          </a:p>
+        </p:txBody>
+      </p:sp>
+      <p:sp>
+        <p:nvSpPr>
+          <p:cNvPr id="3" name="Content Placeholder 2"/>
+          <p:cNvSpPr>
+            <a:spLocks noGrp="1"/>
+          </p:cNvSpPr>
+          <p:nvPr>
+            <p:ph idx="1"/>
+          </p:nvPr>
+        </p:nvSpPr>
+        <p:spPr>
+          <a:xfrm>
+            <a:off x="658368" y="1481328"/>
+            <a:ext cx="10972800" cy="4846320"/>
+          </a:xfrm>
+        </p:spPr>
+        <p:txBody>
+          <a:bodyPr wrap="square">
+            <a:normAutofit/>
+          </a:bodyPr>
+          <a:lstStyle/>
+          <a:p>
+            <a:pPr>
+              <a:spcAft>
+                <a:spcPts val="600"/>
+              </a:spcAft>
+            </a:pPr>
+            <a:r>
+              <a:rPr sz="1500" b="1">
+                <a:solidFill>
+                  <a:srgbClr val="2B6CA3"/>
+                </a:solidFill>
+                <a:latin typeface="Cambria"/>
+              </a:rPr>
+              <a:t>The problem:</a:t>
+            </a:r>
+          </a:p>
+          <a:p>
+            <a:pPr lvl="1">
+              <a:spcAft>
+                <a:spcPts val="600"/>
+              </a:spcAft>
+            </a:pPr>
+            <a:r>
+              <a:rPr sz="1300" b="0">
+                <a:solidFill>
+                  <a:srgbClr val="232A26"/>
+                </a:solidFill>
+                <a:latin typeface="Cambria"/>
+              </a:rPr>
+              <a:t>Normal traffic is one summary every ten seconds. To claim scalability we fired 2,000 messages at the queue from 32 parallel workers, orders of magnitude above normal load.</a:t>
+            </a:r>
+          </a:p>
+          <a:p>
+            <a:pPr>
+              <a:spcAft>
+                <a:spcPts val="600"/>
+              </a:spcAft>
+            </a:pPr>
+            <a:r>
+              <a:rPr sz="1500" b="1">
+                <a:solidFill>
+                  <a:srgbClr val="2B6CA3"/>
+                </a:solidFill>
+                <a:latin typeface="Cambria"/>
+              </a:rPr>
+              <a:t>Why it was hard:</a:t>
+            </a:r>
+          </a:p>
+          <a:p>
+            <a:pPr lvl="1">
+              <a:spcAft>
+                <a:spcPts val="600"/>
+              </a:spcAft>
+            </a:pPr>
+            <a:r>
+              <a:rPr sz="1300" b="0">
+                <a:solidFill>
+                  <a:srgbClr val="232A26"/>
+                </a:solidFill>
+                <a:latin typeface="Cambria"/>
+              </a:rPr>
+              <a:t>From outside, a non-empty queue is ambiguous: a slow consumer and a dead one look identical. The emulator runs the Lambda in a single container, so drain time swings wildly, and a naive pass/fail test either flakes or lies.</a:t>
+            </a:r>
+          </a:p>
+          <a:p>
+            <a:pPr>
+              <a:spcAft>
+                <a:spcPts val="600"/>
+              </a:spcAft>
+            </a:pPr>
+            <a:r>
+              <a:rPr sz="1500" b="1">
+                <a:solidFill>
+                  <a:srgbClr val="2B6CA3"/>
+                </a:solidFill>
+                <a:latin typeface="Cambria"/>
+              </a:rPr>
+              <a:t>The fix:</a:t>
+            </a:r>
+          </a:p>
+          <a:p>
+            <a:pPr lvl="1">
+              <a:spcAft>
+                <a:spcPts val="600"/>
+              </a:spcAft>
+            </a:pPr>
+            <a:r>
+              <a:rPr sz="1300" b="0">
+                <a:solidFill>
+                  <a:srgbClr val="232A26"/>
+                </a:solidFill>
+                <a:latin typeface="Cambria"/>
+              </a:rPr>
+              <a:t>A two-tier check: first assert the queue really absorbed the burst, then require either a full drain in time or a backlog strictly below the post-burst peak. Decreasing numbers prove the consumer is alive and working, not stalled.</a:t>
+            </a:r>
+          </a:p>
+          <a:p>
+            <a:pPr>
+              <a:spcAft>
+                <a:spcPts val="600"/>
+              </a:spcAft>
+            </a:pPr>
+            <a:r>
+              <a:rPr sz="1500" b="0">
+                <a:solidFill>
+                  <a:srgbClr val="232A26"/>
+                </a:solidFill>
+                <a:latin typeface="Cambria"/>
+              </a:rPr>
+              <a:t>Queue backlog over the test: 2,000 after send, falling mid-test, 0 drained.</a:t>
+            </a:r>
+          </a:p>
+          <a:p>
+            <a:pPr>
+              <a:spcAft>
+                <a:spcPts val="600"/>
+              </a:spcAft>
+            </a:pPr>
+            <a:r>
+              <a:rPr sz="1500" b="0">
+                <a:solidFill>
+                  <a:srgbClr val="232A26"/>
+                </a:solidFill>
+                <a:latin typeface="Cambria"/>
+              </a:rPr>
+              <a:t>Strictly decreasing backlog means real progress, not a stall.</a:t>
+            </a:r>
+          </a:p>
+        </p:txBody>
+      </p:sp>
+      <p:sp>
+        <p:nvSpPr>
+          <p:cNvPr id="4" name="Rectangle 3"/>
           <p:cNvSpPr/>
           <p:nvPr/>
         </p:nvSpPr>
         <p:spPr>
           <a:xfrm>
-            <a:off x="658368" y="1325880"/>
-            <a:ext cx="2926080" cy="36576"/>
+            <a:off x="658368" y="1261872"/>
+            <a:ext cx="3108960" cy="36576"/>
           </a:xfrm>
           <a:prstGeom prst="rect">
             <a:avLst/>
@@ -3956,616 +4250,6 @@
 </p:sld>
 </file>
 
-<file path=ppt/slides/slide4.xml><?xml version="1.0" encoding="utf-8"?>
-<p:sld xmlns:a="http://schemas.openxmlformats.org/drawingml/2006/main" xmlns:p="http://schemas.openxmlformats.org/presentationml/2006/main" xmlns:r="http://schemas.openxmlformats.org/officeDocument/2006/relationships">
-  <p:cSld>
-    <p:spTree>
-      <p:nvGrpSpPr>
-        <p:cNvPr id="1" name=""/>
-        <p:cNvGrpSpPr/>
-        <p:nvPr/>
-      </p:nvGrpSpPr>
-      <p:grpSpPr/>
-      <p:sp>
-        <p:nvSpPr>
-          <p:cNvPr id="2" name="Title 1"/>
-          <p:cNvSpPr>
-            <a:spLocks noGrp="1"/>
-          </p:cNvSpPr>
-          <p:nvPr>
-            <p:ph type="title"/>
-          </p:nvPr>
-        </p:nvSpPr>
-        <p:spPr>
-          <a:xfrm>
-            <a:off x="640080" y="457200"/>
-            <a:ext cx="9311335" cy="868680"/>
-          </a:xfrm>
-        </p:spPr>
-        <p:txBody>
-          <a:bodyPr wrap="square" anchor="t"/>
-          <a:lstStyle/>
-          <a:p>
-            <a:pPr algn="l"/>
-            <a:r>
-              <a:rPr b="1" sz="2700">
-                <a:solidFill>
-                  <a:srgbClr val="2B6CA3"/>
-                </a:solidFill>
-                <a:latin typeface="Georgia"/>
-              </a:rPr>
-              <a:t>Demonstration highlights</a:t>
-            </a:r>
-          </a:p>
-        </p:txBody>
-      </p:sp>
-      <p:sp>
-        <p:nvSpPr>
-          <p:cNvPr id="3" name="Content Placeholder 2"/>
-          <p:cNvSpPr>
-            <a:spLocks noGrp="1"/>
-          </p:cNvSpPr>
-          <p:nvPr>
-            <p:ph idx="1"/>
-          </p:nvPr>
-        </p:nvSpPr>
-        <p:spPr>
-          <a:xfrm>
-            <a:off x="658368" y="1508760"/>
-            <a:ext cx="5577840" cy="4754880"/>
-          </a:xfrm>
-        </p:spPr>
-        <p:txBody>
-          <a:bodyPr wrap="square">
-            <a:normAutofit/>
-          </a:bodyPr>
-          <a:lstStyle/>
-          <a:p>
-            <a:pPr>
-              <a:spcAft>
-                <a:spcPts val="800"/>
-              </a:spcAft>
-            </a:pPr>
-            <a:r>
-              <a:rPr sz="1500" b="0">
-                <a:solidFill>
-                  <a:srgbClr val="232A26"/>
-                </a:solidFill>
-                <a:latin typeface="Cambria"/>
-              </a:rPr>
-              <a:t>Dashboard during the end-to-end local run: reading-by-plant matrix, compliance strips, cross-plant trends.</a:t>
-            </a:r>
-          </a:p>
-          <a:p>
-            <a:pPr>
-              <a:spcAft>
-                <a:spcPts val="800"/>
-              </a:spcAft>
-            </a:pPr>
-            <a:r>
-              <a:rPr sz="1500" b="0">
-                <a:solidFill>
-                  <a:srgbClr val="232A26"/>
-                </a:solidFill>
-                <a:latin typeface="Cambria"/>
-              </a:rPr>
-              <a:t>4 / 4 pipeline health checks green: gateway, queue, Lambda, and end-to-end pipeline.</a:t>
-            </a:r>
-          </a:p>
-          <a:p>
-            <a:pPr>
-              <a:spcAft>
-                <a:spcPts val="800"/>
-              </a:spcAft>
-            </a:pPr>
-            <a:r>
-              <a:rPr sz="1500" b="0">
-                <a:solidFill>
-                  <a:srgbClr val="232A26"/>
-                </a:solidFill>
-                <a:latin typeface="Cambria"/>
-              </a:rPr>
-              <a:t>107 automated tests pass across sensors, fog, processor and dashboard.</a:t>
-            </a:r>
-          </a:p>
-          <a:p>
-            <a:pPr>
-              <a:spcAft>
-                <a:spcPts val="800"/>
-              </a:spcAft>
-            </a:pPr>
-            <a:r>
-              <a:rPr sz="1500" b="0">
-                <a:solidFill>
-                  <a:srgbClr val="232A26"/>
-                </a:solidFill>
-                <a:latin typeface="Cambria"/>
-              </a:rPr>
-              <a:t>2,000 message burst absorbed by the queue and drained by the consumer.</a:t>
-            </a:r>
-          </a:p>
-        </p:txBody>
-      </p:sp>
-      <p:sp>
-        <p:nvSpPr>
-          <p:cNvPr id="4" name="Rectangle 3"/>
-          <p:cNvSpPr/>
-          <p:nvPr/>
-        </p:nvSpPr>
-        <p:spPr>
-          <a:xfrm>
-            <a:off x="11140135" y="0"/>
-            <a:ext cx="1051560" cy="6858000"/>
-          </a:xfrm>
-          <a:prstGeom prst="rect">
-            <a:avLst/>
-          </a:prstGeom>
-          <a:solidFill>
-            <a:srgbClr val="2B6CA3"/>
-          </a:solidFill>
-          <a:ln>
-            <a:noFill/>
-          </a:ln>
-          <a:effectLst/>
-        </p:spPr>
-        <p:style>
-          <a:lnRef idx="1">
-            <a:schemeClr val="accent1"/>
-          </a:lnRef>
-          <a:fillRef idx="3">
-            <a:schemeClr val="accent1"/>
-          </a:fillRef>
-          <a:effectRef idx="2">
-            <a:schemeClr val="accent1"/>
-          </a:effectRef>
-          <a:fontRef idx="minor">
-            <a:schemeClr val="lt1"/>
-          </a:fontRef>
-        </p:style>
-        <p:txBody>
-          <a:bodyPr rtlCol="0" anchor="ctr"/>
-          <a:lstStyle/>
-          <a:p>
-            <a:pPr algn="ctr"/>
-          </a:p>
-        </p:txBody>
-      </p:sp>
-      <p:sp>
-        <p:nvSpPr>
-          <p:cNvPr id="5" name="TextBox 4"/>
-          <p:cNvSpPr txBox="1"/>
-          <p:nvPr/>
-        </p:nvSpPr>
-        <p:spPr>
-          <a:xfrm>
-            <a:off x="11140135" y="320040"/>
-            <a:ext cx="1051560" cy="914400"/>
-          </a:xfrm>
-          <a:prstGeom prst="rect">
-            <a:avLst/>
-          </a:prstGeom>
-          <a:noFill/>
-        </p:spPr>
-        <p:txBody>
-          <a:bodyPr wrap="square" anchor="t">
-            <a:spAutoFit/>
-          </a:bodyPr>
-          <a:lstStyle/>
-          <a:p>
-            <a:pPr algn="ctr"/>
-            <a:r>
-              <a:rPr sz="2600" b="1" i="0">
-                <a:solidFill>
-                  <a:srgbClr val="FFFFFF"/>
-                </a:solidFill>
-                <a:latin typeface="Georgia"/>
-              </a:rPr>
-              <a:t>3</a:t>
-            </a:r>
-          </a:p>
-        </p:txBody>
-      </p:sp>
-      <p:sp>
-        <p:nvSpPr>
-          <p:cNvPr id="6" name="Rectangle 5"/>
-          <p:cNvSpPr/>
-          <p:nvPr/>
-        </p:nvSpPr>
-        <p:spPr>
-          <a:xfrm>
-            <a:off x="658368" y="1325880"/>
-            <a:ext cx="2926080" cy="36576"/>
-          </a:xfrm>
-          <a:prstGeom prst="rect">
-            <a:avLst/>
-          </a:prstGeom>
-          <a:solidFill>
-            <a:srgbClr val="2B6CA3"/>
-          </a:solidFill>
-          <a:ln>
-            <a:noFill/>
-          </a:ln>
-          <a:effectLst/>
-        </p:spPr>
-        <p:style>
-          <a:lnRef idx="1">
-            <a:schemeClr val="accent1"/>
-          </a:lnRef>
-          <a:fillRef idx="3">
-            <a:schemeClr val="accent1"/>
-          </a:fillRef>
-          <a:effectRef idx="2">
-            <a:schemeClr val="accent1"/>
-          </a:effectRef>
-          <a:fontRef idx="minor">
-            <a:schemeClr val="lt1"/>
-          </a:fontRef>
-        </p:style>
-        <p:txBody>
-          <a:bodyPr rtlCol="0" anchor="ctr"/>
-          <a:lstStyle/>
-          <a:p>
-            <a:pPr algn="ctr"/>
-          </a:p>
-        </p:txBody>
-      </p:sp>
-      <p:pic>
-        <p:nvPicPr>
-          <p:cNvPr id="7" name="Picture 6" descr="dashboard-desktop.png"/>
-          <p:cNvPicPr>
-            <a:picLocks noChangeAspect="1"/>
-          </p:cNvPicPr>
-          <p:nvPr/>
-        </p:nvPicPr>
-        <p:blipFill>
-          <a:blip r:embed="rId2"/>
-          <a:stretch>
-            <a:fillRect/>
-          </a:stretch>
-        </p:blipFill>
-        <p:spPr>
-          <a:xfrm>
-            <a:off x="6400800" y="2450056"/>
-            <a:ext cx="3824935" cy="2689407"/>
-          </a:xfrm>
-          <a:prstGeom prst="rect">
-            <a:avLst/>
-          </a:prstGeom>
-        </p:spPr>
-      </p:pic>
-    </p:spTree>
-  </p:cSld>
-  <p:clrMapOvr>
-    <a:masterClrMapping/>
-  </p:clrMapOvr>
-</p:sld>
-</file>
-
-<file path=ppt/slides/slide5.xml><?xml version="1.0" encoding="utf-8"?>
-<p:sld xmlns:a="http://schemas.openxmlformats.org/drawingml/2006/main" xmlns:p="http://schemas.openxmlformats.org/presentationml/2006/main" xmlns:r="http://schemas.openxmlformats.org/officeDocument/2006/relationships">
-  <p:cSld>
-    <p:spTree>
-      <p:nvGrpSpPr>
-        <p:cNvPr id="1" name=""/>
-        <p:cNvGrpSpPr/>
-        <p:nvPr/>
-      </p:nvGrpSpPr>
-      <p:grpSpPr/>
-      <p:sp>
-        <p:nvSpPr>
-          <p:cNvPr id="2" name="Title 1"/>
-          <p:cNvSpPr>
-            <a:spLocks noGrp="1"/>
-          </p:cNvSpPr>
-          <p:nvPr>
-            <p:ph type="title"/>
-          </p:nvPr>
-        </p:nvSpPr>
-        <p:spPr>
-          <a:xfrm>
-            <a:off x="640080" y="457200"/>
-            <a:ext cx="9311335" cy="868680"/>
-          </a:xfrm>
-        </p:spPr>
-        <p:txBody>
-          <a:bodyPr wrap="square" anchor="t"/>
-          <a:lstStyle/>
-          <a:p>
-            <a:pPr algn="l"/>
-            <a:r>
-              <a:rPr b="1" sz="2700">
-                <a:solidFill>
-                  <a:srgbClr val="2B6CA3"/>
-                </a:solidFill>
-                <a:latin typeface="Georgia"/>
-              </a:rPr>
-              <a:t>The hardest part: burst survival</a:t>
-            </a:r>
-          </a:p>
-        </p:txBody>
-      </p:sp>
-      <p:sp>
-        <p:nvSpPr>
-          <p:cNvPr id="3" name="Content Placeholder 2"/>
-          <p:cNvSpPr>
-            <a:spLocks noGrp="1"/>
-          </p:cNvSpPr>
-          <p:nvPr>
-            <p:ph idx="1"/>
-          </p:nvPr>
-        </p:nvSpPr>
-        <p:spPr>
-          <a:xfrm>
-            <a:off x="658368" y="1508760"/>
-            <a:ext cx="9402775" cy="4846320"/>
-          </a:xfrm>
-        </p:spPr>
-        <p:txBody>
-          <a:bodyPr wrap="square">
-            <a:normAutofit/>
-          </a:bodyPr>
-          <a:lstStyle/>
-          <a:p>
-            <a:pPr>
-              <a:spcAft>
-                <a:spcPts val="600"/>
-              </a:spcAft>
-            </a:pPr>
-            <a:r>
-              <a:rPr sz="1500" b="1">
-                <a:solidFill>
-                  <a:srgbClr val="2B6CA3"/>
-                </a:solidFill>
-                <a:latin typeface="Cambria"/>
-              </a:rPr>
-              <a:t>The problem:</a:t>
-            </a:r>
-          </a:p>
-          <a:p>
-            <a:pPr lvl="1">
-              <a:spcAft>
-                <a:spcPts val="600"/>
-              </a:spcAft>
-            </a:pPr>
-            <a:r>
-              <a:rPr sz="1300" b="0">
-                <a:solidFill>
-                  <a:srgbClr val="232A26"/>
-                </a:solidFill>
-                <a:latin typeface="Cambria"/>
-              </a:rPr>
-              <a:t>Normal traffic is one summary every ten seconds. To claim scalability we fired 2,000 messages at the queue from 32 parallel workers, orders of magnitude above normal load.</a:t>
-            </a:r>
-          </a:p>
-          <a:p>
-            <a:pPr>
-              <a:spcAft>
-                <a:spcPts val="600"/>
-              </a:spcAft>
-            </a:pPr>
-            <a:r>
-              <a:rPr sz="1500" b="1">
-                <a:solidFill>
-                  <a:srgbClr val="2B6CA3"/>
-                </a:solidFill>
-                <a:latin typeface="Cambria"/>
-              </a:rPr>
-              <a:t>Why it was hard:</a:t>
-            </a:r>
-          </a:p>
-          <a:p>
-            <a:pPr lvl="1">
-              <a:spcAft>
-                <a:spcPts val="600"/>
-              </a:spcAft>
-            </a:pPr>
-            <a:r>
-              <a:rPr sz="1300" b="0">
-                <a:solidFill>
-                  <a:srgbClr val="232A26"/>
-                </a:solidFill>
-                <a:latin typeface="Cambria"/>
-              </a:rPr>
-              <a:t>From outside, a non-empty queue is ambiguous: a slow consumer and a dead one look identical. The emulator runs the Lambda in a single container, so drain time swings wildly, and a naive pass/fail test either flakes or lies.</a:t>
-            </a:r>
-          </a:p>
-          <a:p>
-            <a:pPr>
-              <a:spcAft>
-                <a:spcPts val="600"/>
-              </a:spcAft>
-            </a:pPr>
-            <a:r>
-              <a:rPr sz="1500" b="1">
-                <a:solidFill>
-                  <a:srgbClr val="2B6CA3"/>
-                </a:solidFill>
-                <a:latin typeface="Cambria"/>
-              </a:rPr>
-              <a:t>The fix:</a:t>
-            </a:r>
-          </a:p>
-          <a:p>
-            <a:pPr lvl="1">
-              <a:spcAft>
-                <a:spcPts val="600"/>
-              </a:spcAft>
-            </a:pPr>
-            <a:r>
-              <a:rPr sz="1300" b="0">
-                <a:solidFill>
-                  <a:srgbClr val="232A26"/>
-                </a:solidFill>
-                <a:latin typeface="Cambria"/>
-              </a:rPr>
-              <a:t>A two-tier check: first assert the queue really absorbed the burst, then require either a full drain in time or a backlog strictly below the post-burst peak. Decreasing numbers prove the consumer is alive and working, not stalled.</a:t>
-            </a:r>
-          </a:p>
-          <a:p>
-            <a:pPr>
-              <a:spcAft>
-                <a:spcPts val="600"/>
-              </a:spcAft>
-            </a:pPr>
-            <a:r>
-              <a:rPr sz="1500" b="0">
-                <a:solidFill>
-                  <a:srgbClr val="232A26"/>
-                </a:solidFill>
-                <a:latin typeface="Cambria"/>
-              </a:rPr>
-              <a:t>Queue backlog over the test: 2,000 after send, falling mid-test, 0 drained.</a:t>
-            </a:r>
-          </a:p>
-          <a:p>
-            <a:pPr>
-              <a:spcAft>
-                <a:spcPts val="600"/>
-              </a:spcAft>
-            </a:pPr>
-            <a:r>
-              <a:rPr sz="1500" b="0">
-                <a:solidFill>
-                  <a:srgbClr val="232A26"/>
-                </a:solidFill>
-                <a:latin typeface="Cambria"/>
-              </a:rPr>
-              <a:t>Strictly decreasing backlog means real progress, not a stall.</a:t>
-            </a:r>
-          </a:p>
-        </p:txBody>
-      </p:sp>
-      <p:sp>
-        <p:nvSpPr>
-          <p:cNvPr id="4" name="Rectangle 3"/>
-          <p:cNvSpPr/>
-          <p:nvPr/>
-        </p:nvSpPr>
-        <p:spPr>
-          <a:xfrm>
-            <a:off x="11140135" y="0"/>
-            <a:ext cx="1051560" cy="6858000"/>
-          </a:xfrm>
-          <a:prstGeom prst="rect">
-            <a:avLst/>
-          </a:prstGeom>
-          <a:solidFill>
-            <a:srgbClr val="2B6CA3"/>
-          </a:solidFill>
-          <a:ln>
-            <a:noFill/>
-          </a:ln>
-          <a:effectLst/>
-        </p:spPr>
-        <p:style>
-          <a:lnRef idx="1">
-            <a:schemeClr val="accent1"/>
-          </a:lnRef>
-          <a:fillRef idx="3">
-            <a:schemeClr val="accent1"/>
-          </a:fillRef>
-          <a:effectRef idx="2">
-            <a:schemeClr val="accent1"/>
-          </a:effectRef>
-          <a:fontRef idx="minor">
-            <a:schemeClr val="lt1"/>
-          </a:fontRef>
-        </p:style>
-        <p:txBody>
-          <a:bodyPr rtlCol="0" anchor="ctr"/>
-          <a:lstStyle/>
-          <a:p>
-            <a:pPr algn="ctr"/>
-          </a:p>
-        </p:txBody>
-      </p:sp>
-      <p:sp>
-        <p:nvSpPr>
-          <p:cNvPr id="5" name="TextBox 4"/>
-          <p:cNvSpPr txBox="1"/>
-          <p:nvPr/>
-        </p:nvSpPr>
-        <p:spPr>
-          <a:xfrm>
-            <a:off x="11140135" y="320040"/>
-            <a:ext cx="1051560" cy="914400"/>
-          </a:xfrm>
-          <a:prstGeom prst="rect">
-            <a:avLst/>
-          </a:prstGeom>
-          <a:noFill/>
-        </p:spPr>
-        <p:txBody>
-          <a:bodyPr wrap="square" anchor="t">
-            <a:spAutoFit/>
-          </a:bodyPr>
-          <a:lstStyle/>
-          <a:p>
-            <a:pPr algn="ctr"/>
-            <a:r>
-              <a:rPr sz="2600" b="1" i="0">
-                <a:solidFill>
-                  <a:srgbClr val="FFFFFF"/>
-                </a:solidFill>
-                <a:latin typeface="Georgia"/>
-              </a:rPr>
-              <a:t>4</a:t>
-            </a:r>
-          </a:p>
-        </p:txBody>
-      </p:sp>
-      <p:sp>
-        <p:nvSpPr>
-          <p:cNvPr id="6" name="Rectangle 5"/>
-          <p:cNvSpPr/>
-          <p:nvPr/>
-        </p:nvSpPr>
-        <p:spPr>
-          <a:xfrm>
-            <a:off x="658368" y="1325880"/>
-            <a:ext cx="2926080" cy="36576"/>
-          </a:xfrm>
-          <a:prstGeom prst="rect">
-            <a:avLst/>
-          </a:prstGeom>
-          <a:solidFill>
-            <a:srgbClr val="2B6CA3"/>
-          </a:solidFill>
-          <a:ln>
-            <a:noFill/>
-          </a:ln>
-          <a:effectLst/>
-        </p:spPr>
-        <p:style>
-          <a:lnRef idx="1">
-            <a:schemeClr val="accent1"/>
-          </a:lnRef>
-          <a:fillRef idx="3">
-            <a:schemeClr val="accent1"/>
-          </a:fillRef>
-          <a:effectRef idx="2">
-            <a:schemeClr val="accent1"/>
-          </a:effectRef>
-          <a:fontRef idx="minor">
-            <a:schemeClr val="lt1"/>
-          </a:fontRef>
-        </p:style>
-        <p:txBody>
-          <a:bodyPr rtlCol="0" anchor="ctr"/>
-          <a:lstStyle/>
-          <a:p>
-            <a:pPr algn="ctr"/>
-          </a:p>
-        </p:txBody>
-      </p:sp>
-    </p:spTree>
-  </p:cSld>
-  <p:clrMapOvr>
-    <a:masterClrMapping/>
-  </p:clrMapOvr>
-</p:sld>
-</file>
-
 <file path=ppt/slides/slide6.xml><?xml version="1.0" encoding="utf-8"?>
 <p:sld xmlns:a="http://schemas.openxmlformats.org/drawingml/2006/main" xmlns:p="http://schemas.openxmlformats.org/presentationml/2006/main" xmlns:r="http://schemas.openxmlformats.org/officeDocument/2006/relationships">
   <p:cSld>
@@ -4588,8 +4272,8 @@
         </p:nvSpPr>
         <p:spPr>
           <a:xfrm>
-            <a:off x="640080" y="457200"/>
-            <a:ext cx="9311335" cy="868680"/>
+            <a:off x="640080" y="384048"/>
+            <a:ext cx="10972800" cy="868680"/>
           </a:xfrm>
         </p:spPr>
         <p:txBody>
@@ -4621,8 +4305,8 @@
         </p:nvSpPr>
         <p:spPr>
           <a:xfrm>
-            <a:off x="658368" y="1508760"/>
-            <a:ext cx="9402775" cy="4846320"/>
+            <a:off x="658368" y="1481328"/>
+            <a:ext cx="10972800" cy="4846320"/>
           </a:xfrm>
         </p:spPr>
         <p:txBody>
@@ -4720,87 +4404,8 @@
         </p:nvSpPr>
         <p:spPr>
           <a:xfrm>
-            <a:off x="11140135" y="0"/>
-            <a:ext cx="1051560" cy="6858000"/>
-          </a:xfrm>
-          <a:prstGeom prst="rect">
-            <a:avLst/>
-          </a:prstGeom>
-          <a:solidFill>
-            <a:srgbClr val="2B6CA3"/>
-          </a:solidFill>
-          <a:ln>
-            <a:noFill/>
-          </a:ln>
-          <a:effectLst/>
-        </p:spPr>
-        <p:style>
-          <a:lnRef idx="1">
-            <a:schemeClr val="accent1"/>
-          </a:lnRef>
-          <a:fillRef idx="3">
-            <a:schemeClr val="accent1"/>
-          </a:fillRef>
-          <a:effectRef idx="2">
-            <a:schemeClr val="accent1"/>
-          </a:effectRef>
-          <a:fontRef idx="minor">
-            <a:schemeClr val="lt1"/>
-          </a:fontRef>
-        </p:style>
-        <p:txBody>
-          <a:bodyPr rtlCol="0" anchor="ctr"/>
-          <a:lstStyle/>
-          <a:p>
-            <a:pPr algn="ctr"/>
-          </a:p>
-        </p:txBody>
-      </p:sp>
-      <p:sp>
-        <p:nvSpPr>
-          <p:cNvPr id="5" name="TextBox 4"/>
-          <p:cNvSpPr txBox="1"/>
-          <p:nvPr/>
-        </p:nvSpPr>
-        <p:spPr>
-          <a:xfrm>
-            <a:off x="11140135" y="320040"/>
-            <a:ext cx="1051560" cy="914400"/>
-          </a:xfrm>
-          <a:prstGeom prst="rect">
-            <a:avLst/>
-          </a:prstGeom>
-          <a:noFill/>
-        </p:spPr>
-        <p:txBody>
-          <a:bodyPr wrap="square" anchor="t">
-            <a:spAutoFit/>
-          </a:bodyPr>
-          <a:lstStyle/>
-          <a:p>
-            <a:pPr algn="ctr"/>
-            <a:r>
-              <a:rPr sz="2600" b="1" i="0">
-                <a:solidFill>
-                  <a:srgbClr val="FFFFFF"/>
-                </a:solidFill>
-                <a:latin typeface="Georgia"/>
-              </a:rPr>
-              <a:t>5</a:t>
-            </a:r>
-          </a:p>
-        </p:txBody>
-      </p:sp>
-      <p:sp>
-        <p:nvSpPr>
-          <p:cNvPr id="6" name="Rectangle 5"/>
-          <p:cNvSpPr/>
-          <p:nvPr/>
-        </p:nvSpPr>
-        <p:spPr>
-          <a:xfrm>
-            <a:off x="658368" y="1325880"/>
-            <a:ext cx="2926080" cy="36576"/>
+            <a:off x="658368" y="1261872"/>
+            <a:ext cx="3108960" cy="36576"/>
           </a:xfrm>
           <a:prstGeom prst="rect">
             <a:avLst/>

--- a/ppt/water-treatment-utility.pptx
+++ b/ppt/water-treatment-utility.pptx
@@ -3318,182 +3318,14 @@
       <p:grpSpPr/>
       <p:sp>
         <p:nvSpPr>
-          <p:cNvPr id="2" name="Title 1"/>
-          <p:cNvSpPr>
-            <a:spLocks noGrp="1"/>
-          </p:cNvSpPr>
-          <p:nvPr>
-            <p:ph type="title"/>
-          </p:nvPr>
+          <p:cNvPr id="5" name="Rectangle 4"/>
+          <p:cNvSpPr/>
+          <p:nvPr/>
         </p:nvSpPr>
         <p:spPr>
           <a:xfrm>
-            <a:off x="640080" y="384048"/>
-            <a:ext cx="10972800" cy="868680"/>
-          </a:xfrm>
-        </p:spPr>
-        <p:txBody>
-          <a:bodyPr wrap="square" anchor="t"/>
-          <a:lstStyle/>
-          <a:p>
-            <a:pPr algn="l"/>
-            <a:r>
-              <a:rPr b="1" sz="2700">
-                <a:solidFill>
-                  <a:srgbClr val="2B6CA3"/>
-                </a:solidFill>
-                <a:latin typeface="Georgia"/>
-              </a:rPr>
-              <a:t>Why periodic checking fails</a:t>
-            </a:r>
-          </a:p>
-        </p:txBody>
-      </p:sp>
-      <p:sp>
-        <p:nvSpPr>
-          <p:cNvPr id="3" name="Content Placeholder 2"/>
-          <p:cNvSpPr>
-            <a:spLocks noGrp="1"/>
-          </p:cNvSpPr>
-          <p:nvPr>
-            <p:ph idx="1"/>
-          </p:nvPr>
-        </p:nvSpPr>
-        <p:spPr>
-          <a:xfrm>
-            <a:off x="658368" y="1481328"/>
-            <a:ext cx="10972800" cy="4846320"/>
-          </a:xfrm>
-        </p:spPr>
-        <p:txBody>
-          <a:bodyPr wrap="square">
-            <a:normAutofit/>
-          </a:bodyPr>
-          <a:lstStyle/>
-          <a:p>
-            <a:pPr>
-              <a:spcAft>
-                <a:spcPts val="900"/>
-              </a:spcAft>
-            </a:pPr>
-            <a:r>
-              <a:rPr sz="1700" b="0">
-                <a:solidFill>
-                  <a:srgbClr val="232A26"/>
-                </a:solidFill>
-                <a:latin typeface="Cambria"/>
-              </a:rPr>
-              <a:t>Treatment quality moves second by second, and grab samples and periodic control-room rounds only ever see snapshots.</a:t>
-            </a:r>
-          </a:p>
-          <a:p>
-            <a:pPr>
-              <a:spcAft>
-                <a:spcPts val="900"/>
-              </a:spcAft>
-            </a:pPr>
-            <a:r>
-              <a:rPr sz="1700" b="0">
-                <a:solidFill>
-                  <a:srgbClr val="232A26"/>
-                </a:solidFill>
-                <a:latin typeface="Cambria"/>
-              </a:rPr>
-              <a:t>Ten sensor points across two plants stream turbidity, pH, chlorine, flow and pressure every 1 to 3 seconds, far faster than any manual round.</a:t>
-            </a:r>
-          </a:p>
-          <a:p>
-            <a:pPr>
-              <a:spcAft>
-                <a:spcPts val="900"/>
-              </a:spcAft>
-            </a:pPr>
-            <a:r>
-              <a:rPr sz="1700" b="0">
-                <a:solidFill>
-                  <a:srgbClr val="232A26"/>
-                </a:solidFill>
-                <a:latin typeface="Cambria"/>
-              </a:rPr>
-              <a:t>Transient events vanish into averages: a momentary pressure drop can mean a hydraulic fault even when the daily mean looks perfectly healthy.</a:t>
-            </a:r>
-          </a:p>
-          <a:p>
-            <a:pPr>
-              <a:spcAft>
-                <a:spcPts val="900"/>
-              </a:spcAft>
-            </a:pPr>
-            <a:r>
-              <a:rPr sz="1700" b="0">
-                <a:solidFill>
-                  <a:srgbClr val="232A26"/>
-                </a:solidFill>
-                <a:latin typeface="Cambria"/>
-              </a:rPr>
-              <a:t>This pipeline scores every 10-second window as it closes, so a violation raises an alert in seconds, not at the next scheduled check.</a:t>
-            </a:r>
-          </a:p>
-          <a:p>
-            <a:pPr>
-              <a:spcAft>
-                <a:spcPts val="900"/>
-              </a:spcAft>
-            </a:pPr>
-            <a:r>
-              <a:rPr sz="1700" b="1">
-                <a:solidFill>
-                  <a:srgbClr val="2B6CA3"/>
-                </a:solidFill>
-                <a:latin typeface="Cambria"/>
-              </a:rPr>
-              <a:t>Two thresholds are checked against the window, never the average:</a:t>
-            </a:r>
-          </a:p>
-          <a:p>
-            <a:pPr lvl="1">
-              <a:spcAft>
-                <a:spcPts val="900"/>
-              </a:spcAft>
-            </a:pPr>
-            <a:r>
-              <a:rPr sz="1500" b="0">
-                <a:solidFill>
-                  <a:srgbClr val="232A26"/>
-                </a:solidFill>
-                <a:latin typeface="Cambria"/>
-              </a:rPr>
-              <a:t>Low-pressure fault at &lt; 2 bar, checked against the window minimum, so a brief dip cannot hide.</a:t>
-            </a:r>
-          </a:p>
-          <a:p>
-            <a:pPr lvl="1">
-              <a:spcAft>
-                <a:spcPts val="900"/>
-              </a:spcAft>
-            </a:pPr>
-            <a:r>
-              <a:rPr sz="1500" b="0">
-                <a:solidFill>
-                  <a:srgbClr val="232A26"/>
-                </a:solidFill>
-                <a:latin typeface="Cambria"/>
-              </a:rPr>
-              <a:t>Chlorine residual floor at &lt; 0.2 ppm, with an under-chlorination alert firing in the same window it happens.</a:t>
-            </a:r>
-          </a:p>
-        </p:txBody>
-      </p:sp>
-      <p:sp>
-        <p:nvSpPr>
-          <p:cNvPr id="4" name="Rectangle 3"/>
-          <p:cNvSpPr/>
-          <p:nvPr/>
-        </p:nvSpPr>
-        <p:spPr>
-          <a:xfrm>
-            <a:off x="658368" y="1261872"/>
-            <a:ext cx="3108960" cy="36576"/>
+            <a:off x="-91440" y="6693408"/>
+            <a:ext cx="12435840" cy="164592"/>
           </a:xfrm>
           <a:prstGeom prst="rect">
             <a:avLst/>
@@ -3528,224 +3360,6 @@
           </a:p>
         </p:txBody>
       </p:sp>
-    </p:spTree>
-  </p:cSld>
-  <p:clrMapOvr>
-    <a:masterClrMapping/>
-  </p:clrMapOvr>
-</p:sld>
-</file>
-
-<file path=ppt/slides/slide3.xml><?xml version="1.0" encoding="utf-8"?>
-<p:sld xmlns:a="http://schemas.openxmlformats.org/drawingml/2006/main" xmlns:p="http://schemas.openxmlformats.org/presentationml/2006/main" xmlns:r="http://schemas.openxmlformats.org/officeDocument/2006/relationships">
-  <p:cSld>
-    <p:spTree>
-      <p:nvGrpSpPr>
-        <p:cNvPr id="1" name=""/>
-        <p:cNvGrpSpPr/>
-        <p:nvPr/>
-      </p:nvGrpSpPr>
-      <p:grpSpPr/>
-      <p:sp>
-        <p:nvSpPr>
-          <p:cNvPr id="2" name="Title 1"/>
-          <p:cNvSpPr>
-            <a:spLocks noGrp="1"/>
-          </p:cNvSpPr>
-          <p:nvPr>
-            <p:ph type="title"/>
-          </p:nvPr>
-        </p:nvSpPr>
-        <p:spPr>
-          <a:xfrm>
-            <a:off x="640080" y="384048"/>
-            <a:ext cx="10972800" cy="868680"/>
-          </a:xfrm>
-        </p:spPr>
-        <p:txBody>
-          <a:bodyPr wrap="square" anchor="t"/>
-          <a:lstStyle/>
-          <a:p>
-            <a:pPr algn="l"/>
-            <a:r>
-              <a:rPr b="1" sz="2700">
-                <a:solidFill>
-                  <a:srgbClr val="2B6CA3"/>
-                </a:solidFill>
-                <a:latin typeface="Georgia"/>
-              </a:rPr>
-              <a:t>How it works: intake to dashboard</a:t>
-            </a:r>
-          </a:p>
-        </p:txBody>
-      </p:sp>
-      <p:sp>
-        <p:nvSpPr>
-          <p:cNvPr id="3" name="Content Placeholder 2"/>
-          <p:cNvSpPr>
-            <a:spLocks noGrp="1"/>
-          </p:cNvSpPr>
-          <p:nvPr>
-            <p:ph idx="1"/>
-          </p:nvPr>
-        </p:nvSpPr>
-        <p:spPr>
-          <a:xfrm>
-            <a:off x="658368" y="1481328"/>
-            <a:ext cx="10972800" cy="4846320"/>
-          </a:xfrm>
-        </p:spPr>
-        <p:txBody>
-          <a:bodyPr wrap="square">
-            <a:normAutofit/>
-          </a:bodyPr>
-          <a:lstStyle/>
-          <a:p>
-            <a:pPr>
-              <a:spcAft>
-                <a:spcPts val="600"/>
-              </a:spcAft>
-            </a:pPr>
-            <a:r>
-              <a:rPr sz="1500" b="1">
-                <a:solidFill>
-                  <a:srgbClr val="2B6CA3"/>
-                </a:solidFill>
-                <a:latin typeface="Cambria"/>
-              </a:rPr>
-              <a:t>At the plant, edge:</a:t>
-            </a:r>
-          </a:p>
-          <a:p>
-            <a:pPr lvl="1">
-              <a:spcAft>
-                <a:spcPts val="600"/>
-              </a:spcAft>
-            </a:pPr>
-            <a:r>
-              <a:rPr sz="1300" b="0">
-                <a:solidFill>
-                  <a:srgbClr val="232A26"/>
-                </a:solidFill>
-                <a:latin typeface="Cambria"/>
-              </a:rPr>
-              <a:t>Sensors: 10 field sensors across 2 plants.</a:t>
-            </a:r>
-          </a:p>
-          <a:p>
-            <a:pPr lvl="1">
-              <a:spcAft>
-                <a:spcPts val="600"/>
-              </a:spcAft>
-            </a:pPr>
-            <a:r>
-              <a:rPr sz="1300" b="0">
-                <a:solidFill>
-                  <a:srgbClr val="232A26"/>
-                </a:solidFill>
-                <a:latin typeface="Cambria"/>
-              </a:rPr>
-              <a:t>Fog node: 10-second windows, aggregate, alert gates.</a:t>
-            </a:r>
-          </a:p>
-          <a:p>
-            <a:pPr>
-              <a:spcAft>
-                <a:spcPts val="600"/>
-              </a:spcAft>
-            </a:pPr>
-            <a:r>
-              <a:rPr sz="1500" b="1">
-                <a:solidFill>
-                  <a:srgbClr val="2B6CA3"/>
-                </a:solidFill>
-                <a:latin typeface="Cambria"/>
-              </a:rPr>
-              <a:t>AWS cloud:</a:t>
-            </a:r>
-          </a:p>
-          <a:p>
-            <a:pPr lvl="1">
-              <a:spcAft>
-                <a:spcPts val="600"/>
-              </a:spcAft>
-            </a:pPr>
-            <a:r>
-              <a:rPr sz="1300" b="0">
-                <a:solidFill>
-                  <a:srgbClr val="232A26"/>
-                </a:solidFill>
-                <a:latin typeface="Cambria"/>
-              </a:rPr>
-              <a:t>Amazon SQS: one summary per window, batched.</a:t>
-            </a:r>
-          </a:p>
-          <a:p>
-            <a:pPr lvl="1">
-              <a:spcAft>
-                <a:spcPts val="600"/>
-              </a:spcAft>
-            </a:pPr>
-            <a:r>
-              <a:rPr sz="1300" b="0">
-                <a:solidFill>
-                  <a:srgbClr val="232A26"/>
-                </a:solidFill>
-                <a:latin typeface="Cambria"/>
-              </a:rPr>
-              <a:t>AWS Lambda: serverless ingest of each summary.</a:t>
-            </a:r>
-          </a:p>
-          <a:p>
-            <a:pPr lvl="1">
-              <a:spcAft>
-                <a:spcPts val="600"/>
-              </a:spcAft>
-            </a:pPr>
-            <a:r>
-              <a:rPr sz="1300" b="0">
-                <a:solidFill>
-                  <a:srgbClr val="232A26"/>
-                </a:solidFill>
-                <a:latin typeface="Cambria"/>
-              </a:rPr>
-              <a:t>DynamoDB: time-series store of every window.</a:t>
-            </a:r>
-          </a:p>
-          <a:p>
-            <a:pPr lvl="1">
-              <a:spcAft>
-                <a:spcPts val="600"/>
-              </a:spcAft>
-            </a:pPr>
-            <a:r>
-              <a:rPr sz="1300" b="0">
-                <a:solidFill>
-                  <a:srgbClr val="232A26"/>
-                </a:solidFill>
-                <a:latin typeface="Cambria"/>
-              </a:rPr>
-              <a:t>Live dashboard: served via S3 and API Gateway.</a:t>
-            </a:r>
-          </a:p>
-          <a:p>
-            <a:pPr>
-              <a:spcAft>
-                <a:spcPts val="600"/>
-              </a:spcAft>
-            </a:pPr>
-            <a:r>
-              <a:rPr sz="1500" b="0">
-                <a:solidFill>
-                  <a:srgbClr val="232A26"/>
-                </a:solidFill>
-                <a:latin typeface="Cambria"/>
-              </a:rPr>
-              <a:t>Verified end to end locally with Docker and an AWS emulator, and the same AWS SDK code deploys to real AWS in a single scripted step.</a:t>
-            </a:r>
-          </a:p>
-        </p:txBody>
-      </p:sp>
       <p:sp>
         <p:nvSpPr>
           <p:cNvPr id="4" name="Rectangle 3"/>
@@ -3754,8 +3368,8 @@
         </p:nvSpPr>
         <p:spPr>
           <a:xfrm>
-            <a:off x="658368" y="1261872"/>
-            <a:ext cx="3108960" cy="36576"/>
+            <a:off x="-91440" y="0"/>
+            <a:ext cx="12435840" cy="164592"/>
           </a:xfrm>
           <a:prstGeom prst="rect">
             <a:avLst/>
@@ -3790,6 +3404,174 @@
           </a:p>
         </p:txBody>
       </p:sp>
+      <p:sp>
+        <p:nvSpPr>
+          <p:cNvPr id="2" name="Title 1"/>
+          <p:cNvSpPr>
+            <a:spLocks noGrp="1"/>
+          </p:cNvSpPr>
+          <p:nvPr>
+            <p:ph type="title"/>
+          </p:nvPr>
+        </p:nvSpPr>
+        <p:spPr>
+          <a:xfrm>
+            <a:off x="640080" y="457200"/>
+            <a:ext cx="10972800" cy="868680"/>
+          </a:xfrm>
+        </p:spPr>
+        <p:txBody>
+          <a:bodyPr wrap="square" anchor="t"/>
+          <a:lstStyle/>
+          <a:p>
+            <a:pPr algn="l"/>
+            <a:r>
+              <a:rPr b="1" sz="2700">
+                <a:solidFill>
+                  <a:srgbClr val="2B6CA3"/>
+                </a:solidFill>
+                <a:latin typeface="Georgia"/>
+              </a:rPr>
+              <a:t>Why periodic checking fails</a:t>
+            </a:r>
+          </a:p>
+        </p:txBody>
+      </p:sp>
+      <p:sp>
+        <p:nvSpPr>
+          <p:cNvPr id="3" name="Content Placeholder 2"/>
+          <p:cNvSpPr>
+            <a:spLocks noGrp="1"/>
+          </p:cNvSpPr>
+          <p:nvPr>
+            <p:ph idx="1"/>
+          </p:nvPr>
+        </p:nvSpPr>
+        <p:spPr>
+          <a:xfrm>
+            <a:off x="658368" y="1463040"/>
+            <a:ext cx="10972800" cy="4754880"/>
+          </a:xfrm>
+        </p:spPr>
+        <p:txBody>
+          <a:bodyPr wrap="square">
+            <a:normAutofit/>
+          </a:bodyPr>
+          <a:lstStyle/>
+          <a:p>
+            <a:pPr>
+              <a:spcAft>
+                <a:spcPts val="900"/>
+              </a:spcAft>
+            </a:pPr>
+            <a:r>
+              <a:rPr sz="1700" b="0">
+                <a:solidFill>
+                  <a:srgbClr val="232A26"/>
+                </a:solidFill>
+                <a:latin typeface="Cambria"/>
+              </a:rPr>
+              <a:t>Treatment quality moves second by second, and grab samples and periodic control-room rounds only ever see snapshots.</a:t>
+            </a:r>
+          </a:p>
+          <a:p>
+            <a:pPr>
+              <a:spcAft>
+                <a:spcPts val="900"/>
+              </a:spcAft>
+            </a:pPr>
+            <a:r>
+              <a:rPr sz="1700" b="0">
+                <a:solidFill>
+                  <a:srgbClr val="232A26"/>
+                </a:solidFill>
+                <a:latin typeface="Cambria"/>
+              </a:rPr>
+              <a:t>Ten sensor points across two plants stream turbidity, pH, chlorine, flow and pressure every 1 to 3 seconds, far faster than any manual round.</a:t>
+            </a:r>
+          </a:p>
+          <a:p>
+            <a:pPr>
+              <a:spcAft>
+                <a:spcPts val="900"/>
+              </a:spcAft>
+            </a:pPr>
+            <a:r>
+              <a:rPr sz="1700" b="0">
+                <a:solidFill>
+                  <a:srgbClr val="232A26"/>
+                </a:solidFill>
+                <a:latin typeface="Cambria"/>
+              </a:rPr>
+              <a:t>Transient events vanish into averages: a momentary pressure drop can mean a hydraulic fault even when the daily mean looks perfectly healthy.</a:t>
+            </a:r>
+          </a:p>
+          <a:p>
+            <a:pPr>
+              <a:spcAft>
+                <a:spcPts val="900"/>
+              </a:spcAft>
+            </a:pPr>
+            <a:r>
+              <a:rPr sz="1700" b="0">
+                <a:solidFill>
+                  <a:srgbClr val="232A26"/>
+                </a:solidFill>
+                <a:latin typeface="Cambria"/>
+              </a:rPr>
+              <a:t>This pipeline scores every 10-second window as it closes, so a violation raises an alert in seconds, not at the next scheduled check.</a:t>
+            </a:r>
+          </a:p>
+          <a:p>
+            <a:pPr>
+              <a:spcAft>
+                <a:spcPts val="900"/>
+              </a:spcAft>
+            </a:pPr>
+            <a:r>
+              <a:rPr sz="1700" b="1">
+                <a:solidFill>
+                  <a:srgbClr val="2B6CA3"/>
+                </a:solidFill>
+                <a:latin typeface="Cambria"/>
+              </a:rPr>
+              <a:t>Two thresholds are checked against the window, never the average:</a:t>
+            </a:r>
+          </a:p>
+          <a:p>
+            <a:pPr lvl="1">
+              <a:spcAft>
+                <a:spcPts val="900"/>
+              </a:spcAft>
+            </a:pPr>
+            <a:r>
+              <a:rPr sz="1500" b="0">
+                <a:solidFill>
+                  <a:srgbClr val="232A26"/>
+                </a:solidFill>
+                <a:latin typeface="Cambria"/>
+              </a:rPr>
+              <a:t>Low-pressure fault at &lt; 2 bar, checked against the window minimum, so a brief dip cannot hide.</a:t>
+            </a:r>
+          </a:p>
+          <a:p>
+            <a:pPr lvl="1">
+              <a:spcAft>
+                <a:spcPts val="900"/>
+              </a:spcAft>
+            </a:pPr>
+            <a:r>
+              <a:rPr sz="1500" b="0">
+                <a:solidFill>
+                  <a:srgbClr val="232A26"/>
+                </a:solidFill>
+                <a:latin typeface="Cambria"/>
+              </a:rPr>
+              <a:t>Chlorine residual floor at &lt; 0.2 ppm, with an under-chlorination alert firing in the same window it happens.</a:t>
+            </a:r>
+          </a:p>
+        </p:txBody>
+      </p:sp>
     </p:spTree>
   </p:cSld>
   <p:clrMapOvr>
@@ -3798,7 +3580,7 @@
 </p:sld>
 </file>
 
-<file path=ppt/slides/slide4.xml><?xml version="1.0" encoding="utf-8"?>
+<file path=ppt/slides/slide3.xml><?xml version="1.0" encoding="utf-8"?>
 <p:sld xmlns:a="http://schemas.openxmlformats.org/drawingml/2006/main" xmlns:p="http://schemas.openxmlformats.org/presentationml/2006/main" xmlns:r="http://schemas.openxmlformats.org/officeDocument/2006/relationships">
   <p:cSld>
     <p:spTree>
@@ -3810,134 +3592,14 @@
       <p:grpSpPr/>
       <p:sp>
         <p:nvSpPr>
-          <p:cNvPr id="2" name="Title 1"/>
-          <p:cNvSpPr>
-            <a:spLocks noGrp="1"/>
-          </p:cNvSpPr>
-          <p:nvPr>
-            <p:ph type="title"/>
-          </p:nvPr>
+          <p:cNvPr id="5" name="Rectangle 4"/>
+          <p:cNvSpPr/>
+          <p:nvPr/>
         </p:nvSpPr>
         <p:spPr>
           <a:xfrm>
-            <a:off x="640080" y="384048"/>
-            <a:ext cx="10972800" cy="868680"/>
-          </a:xfrm>
-        </p:spPr>
-        <p:txBody>
-          <a:bodyPr wrap="square" anchor="t"/>
-          <a:lstStyle/>
-          <a:p>
-            <a:pPr algn="l"/>
-            <a:r>
-              <a:rPr b="1" sz="2700">
-                <a:solidFill>
-                  <a:srgbClr val="2B6CA3"/>
-                </a:solidFill>
-                <a:latin typeface="Georgia"/>
-              </a:rPr>
-              <a:t>Demonstration highlights</a:t>
-            </a:r>
-          </a:p>
-        </p:txBody>
-      </p:sp>
-      <p:sp>
-        <p:nvSpPr>
-          <p:cNvPr id="3" name="Content Placeholder 2"/>
-          <p:cNvSpPr>
-            <a:spLocks noGrp="1"/>
-          </p:cNvSpPr>
-          <p:nvPr>
-            <p:ph idx="1"/>
-          </p:nvPr>
-        </p:nvSpPr>
-        <p:spPr>
-          <a:xfrm>
-            <a:off x="658368" y="1481328"/>
-            <a:ext cx="5760720" cy="4754880"/>
-          </a:xfrm>
-        </p:spPr>
-        <p:txBody>
-          <a:bodyPr wrap="square">
-            <a:normAutofit/>
-          </a:bodyPr>
-          <a:lstStyle/>
-          <a:p>
-            <a:pPr>
-              <a:spcAft>
-                <a:spcPts val="800"/>
-              </a:spcAft>
-            </a:pPr>
-            <a:r>
-              <a:rPr sz="1500" b="0">
-                <a:solidFill>
-                  <a:srgbClr val="232A26"/>
-                </a:solidFill>
-                <a:latin typeface="Cambria"/>
-              </a:rPr>
-              <a:t>Dashboard during the end-to-end local run: reading-by-plant matrix, compliance strips, cross-plant trends.</a:t>
-            </a:r>
-          </a:p>
-          <a:p>
-            <a:pPr>
-              <a:spcAft>
-                <a:spcPts val="800"/>
-              </a:spcAft>
-            </a:pPr>
-            <a:r>
-              <a:rPr sz="1500" b="0">
-                <a:solidFill>
-                  <a:srgbClr val="232A26"/>
-                </a:solidFill>
-                <a:latin typeface="Cambria"/>
-              </a:rPr>
-              <a:t>4 / 4 pipeline health checks green: gateway, queue, Lambda, and end-to-end pipeline.</a:t>
-            </a:r>
-          </a:p>
-          <a:p>
-            <a:pPr>
-              <a:spcAft>
-                <a:spcPts val="800"/>
-              </a:spcAft>
-            </a:pPr>
-            <a:r>
-              <a:rPr sz="1500" b="0">
-                <a:solidFill>
-                  <a:srgbClr val="232A26"/>
-                </a:solidFill>
-                <a:latin typeface="Cambria"/>
-              </a:rPr>
-              <a:t>107 automated tests pass across sensors, fog, processor and dashboard.</a:t>
-            </a:r>
-          </a:p>
-          <a:p>
-            <a:pPr>
-              <a:spcAft>
-                <a:spcPts val="800"/>
-              </a:spcAft>
-            </a:pPr>
-            <a:r>
-              <a:rPr sz="1500" b="0">
-                <a:solidFill>
-                  <a:srgbClr val="232A26"/>
-                </a:solidFill>
-                <a:latin typeface="Cambria"/>
-              </a:rPr>
-              <a:t>2,000 message burst absorbed by the queue and drained by the consumer.</a:t>
-            </a:r>
-          </a:p>
-        </p:txBody>
-      </p:sp>
-      <p:sp>
-        <p:nvSpPr>
-          <p:cNvPr id="4" name="Rectangle 3"/>
-          <p:cNvSpPr/>
-          <p:nvPr/>
-        </p:nvSpPr>
-        <p:spPr>
-          <a:xfrm>
-            <a:off x="658368" y="1261872"/>
-            <a:ext cx="3108960" cy="36576"/>
+            <a:off x="-91440" y="6693408"/>
+            <a:ext cx="12435840" cy="164592"/>
           </a:xfrm>
           <a:prstGeom prst="rect">
             <a:avLst/>
@@ -3972,232 +3634,6 @@
           </a:p>
         </p:txBody>
       </p:sp>
-      <p:pic>
-        <p:nvPicPr>
-          <p:cNvPr id="5" name="Picture 4" descr="dashboard-desktop.png"/>
-          <p:cNvPicPr>
-            <a:picLocks noChangeAspect="1"/>
-          </p:cNvPicPr>
-          <p:nvPr/>
-        </p:nvPicPr>
-        <p:blipFill>
-          <a:blip r:embed="rId2"/>
-          <a:stretch>
-            <a:fillRect/>
-          </a:stretch>
-        </p:blipFill>
-        <p:spPr>
-          <a:xfrm>
-            <a:off x="6629400" y="2003679"/>
-            <a:ext cx="5120640" cy="3600449"/>
-          </a:xfrm>
-          <a:prstGeom prst="rect">
-            <a:avLst/>
-          </a:prstGeom>
-        </p:spPr>
-      </p:pic>
-    </p:spTree>
-  </p:cSld>
-  <p:clrMapOvr>
-    <a:masterClrMapping/>
-  </p:clrMapOvr>
-</p:sld>
-</file>
-
-<file path=ppt/slides/slide5.xml><?xml version="1.0" encoding="utf-8"?>
-<p:sld xmlns:a="http://schemas.openxmlformats.org/drawingml/2006/main" xmlns:p="http://schemas.openxmlformats.org/presentationml/2006/main" xmlns:r="http://schemas.openxmlformats.org/officeDocument/2006/relationships">
-  <p:cSld>
-    <p:spTree>
-      <p:nvGrpSpPr>
-        <p:cNvPr id="1" name=""/>
-        <p:cNvGrpSpPr/>
-        <p:nvPr/>
-      </p:nvGrpSpPr>
-      <p:grpSpPr/>
-      <p:sp>
-        <p:nvSpPr>
-          <p:cNvPr id="2" name="Title 1"/>
-          <p:cNvSpPr>
-            <a:spLocks noGrp="1"/>
-          </p:cNvSpPr>
-          <p:nvPr>
-            <p:ph type="title"/>
-          </p:nvPr>
-        </p:nvSpPr>
-        <p:spPr>
-          <a:xfrm>
-            <a:off x="640080" y="384048"/>
-            <a:ext cx="10972800" cy="868680"/>
-          </a:xfrm>
-        </p:spPr>
-        <p:txBody>
-          <a:bodyPr wrap="square" anchor="t"/>
-          <a:lstStyle/>
-          <a:p>
-            <a:pPr algn="l"/>
-            <a:r>
-              <a:rPr b="1" sz="2700">
-                <a:solidFill>
-                  <a:srgbClr val="2B6CA3"/>
-                </a:solidFill>
-                <a:latin typeface="Georgia"/>
-              </a:rPr>
-              <a:t>The hardest part: burst survival</a:t>
-            </a:r>
-          </a:p>
-        </p:txBody>
-      </p:sp>
-      <p:sp>
-        <p:nvSpPr>
-          <p:cNvPr id="3" name="Content Placeholder 2"/>
-          <p:cNvSpPr>
-            <a:spLocks noGrp="1"/>
-          </p:cNvSpPr>
-          <p:nvPr>
-            <p:ph idx="1"/>
-          </p:nvPr>
-        </p:nvSpPr>
-        <p:spPr>
-          <a:xfrm>
-            <a:off x="658368" y="1481328"/>
-            <a:ext cx="10972800" cy="4846320"/>
-          </a:xfrm>
-        </p:spPr>
-        <p:txBody>
-          <a:bodyPr wrap="square">
-            <a:normAutofit/>
-          </a:bodyPr>
-          <a:lstStyle/>
-          <a:p>
-            <a:pPr>
-              <a:spcAft>
-                <a:spcPts val="600"/>
-              </a:spcAft>
-            </a:pPr>
-            <a:r>
-              <a:rPr sz="1500" b="1">
-                <a:solidFill>
-                  <a:srgbClr val="2B6CA3"/>
-                </a:solidFill>
-                <a:latin typeface="Cambria"/>
-              </a:rPr>
-              <a:t>The problem:</a:t>
-            </a:r>
-          </a:p>
-          <a:p>
-            <a:pPr lvl="1">
-              <a:spcAft>
-                <a:spcPts val="600"/>
-              </a:spcAft>
-            </a:pPr>
-            <a:r>
-              <a:rPr sz="1300" b="0">
-                <a:solidFill>
-                  <a:srgbClr val="232A26"/>
-                </a:solidFill>
-                <a:latin typeface="Cambria"/>
-              </a:rPr>
-              <a:t>Normal traffic is one summary every ten seconds. To claim scalability we fired 2,000 messages at the queue from 32 parallel workers, orders of magnitude above normal load.</a:t>
-            </a:r>
-          </a:p>
-          <a:p>
-            <a:pPr>
-              <a:spcAft>
-                <a:spcPts val="600"/>
-              </a:spcAft>
-            </a:pPr>
-            <a:r>
-              <a:rPr sz="1500" b="1">
-                <a:solidFill>
-                  <a:srgbClr val="2B6CA3"/>
-                </a:solidFill>
-                <a:latin typeface="Cambria"/>
-              </a:rPr>
-              <a:t>Why it was hard:</a:t>
-            </a:r>
-          </a:p>
-          <a:p>
-            <a:pPr lvl="1">
-              <a:spcAft>
-                <a:spcPts val="600"/>
-              </a:spcAft>
-            </a:pPr>
-            <a:r>
-              <a:rPr sz="1300" b="0">
-                <a:solidFill>
-                  <a:srgbClr val="232A26"/>
-                </a:solidFill>
-                <a:latin typeface="Cambria"/>
-              </a:rPr>
-              <a:t>From outside, a non-empty queue is ambiguous: a slow consumer and a dead one look identical. The emulator runs the Lambda in a single container, so drain time swings wildly, and a naive pass/fail test either flakes or lies.</a:t>
-            </a:r>
-          </a:p>
-          <a:p>
-            <a:pPr>
-              <a:spcAft>
-                <a:spcPts val="600"/>
-              </a:spcAft>
-            </a:pPr>
-            <a:r>
-              <a:rPr sz="1500" b="1">
-                <a:solidFill>
-                  <a:srgbClr val="2B6CA3"/>
-                </a:solidFill>
-                <a:latin typeface="Cambria"/>
-              </a:rPr>
-              <a:t>The fix:</a:t>
-            </a:r>
-          </a:p>
-          <a:p>
-            <a:pPr lvl="1">
-              <a:spcAft>
-                <a:spcPts val="600"/>
-              </a:spcAft>
-            </a:pPr>
-            <a:r>
-              <a:rPr sz="1300" b="0">
-                <a:solidFill>
-                  <a:srgbClr val="232A26"/>
-                </a:solidFill>
-                <a:latin typeface="Cambria"/>
-              </a:rPr>
-              <a:t>A two-tier check: first assert the queue really absorbed the burst, then require either a full drain in time or a backlog strictly below the post-burst peak. Decreasing numbers prove the consumer is alive and working, not stalled.</a:t>
-            </a:r>
-          </a:p>
-          <a:p>
-            <a:pPr>
-              <a:spcAft>
-                <a:spcPts val="600"/>
-              </a:spcAft>
-            </a:pPr>
-            <a:r>
-              <a:rPr sz="1500" b="0">
-                <a:solidFill>
-                  <a:srgbClr val="232A26"/>
-                </a:solidFill>
-                <a:latin typeface="Cambria"/>
-              </a:rPr>
-              <a:t>Queue backlog over the test: 2,000 after send, falling mid-test, 0 drained.</a:t>
-            </a:r>
-          </a:p>
-          <a:p>
-            <a:pPr>
-              <a:spcAft>
-                <a:spcPts val="600"/>
-              </a:spcAft>
-            </a:pPr>
-            <a:r>
-              <a:rPr sz="1500" b="0">
-                <a:solidFill>
-                  <a:srgbClr val="232A26"/>
-                </a:solidFill>
-                <a:latin typeface="Cambria"/>
-              </a:rPr>
-              <a:t>Strictly decreasing backlog means real progress, not a stall.</a:t>
-            </a:r>
-          </a:p>
-        </p:txBody>
-      </p:sp>
       <p:sp>
         <p:nvSpPr>
           <p:cNvPr id="4" name="Rectangle 3"/>
@@ -4206,8 +3642,8 @@
         </p:nvSpPr>
         <p:spPr>
           <a:xfrm>
-            <a:off x="658368" y="1261872"/>
-            <a:ext cx="3108960" cy="36576"/>
+            <a:off x="-91440" y="0"/>
+            <a:ext cx="12435840" cy="164592"/>
           </a:xfrm>
           <a:prstGeom prst="rect">
             <a:avLst/>
@@ -4242,6 +3678,206 @@
           </a:p>
         </p:txBody>
       </p:sp>
+      <p:sp>
+        <p:nvSpPr>
+          <p:cNvPr id="2" name="Title 1"/>
+          <p:cNvSpPr>
+            <a:spLocks noGrp="1"/>
+          </p:cNvSpPr>
+          <p:nvPr>
+            <p:ph type="title"/>
+          </p:nvPr>
+        </p:nvSpPr>
+        <p:spPr>
+          <a:xfrm>
+            <a:off x="640080" y="457200"/>
+            <a:ext cx="10972800" cy="868680"/>
+          </a:xfrm>
+        </p:spPr>
+        <p:txBody>
+          <a:bodyPr wrap="square" anchor="t"/>
+          <a:lstStyle/>
+          <a:p>
+            <a:pPr algn="l"/>
+            <a:r>
+              <a:rPr b="1" sz="2700">
+                <a:solidFill>
+                  <a:srgbClr val="2B6CA3"/>
+                </a:solidFill>
+                <a:latin typeface="Georgia"/>
+              </a:rPr>
+              <a:t>How it works: intake to dashboard</a:t>
+            </a:r>
+          </a:p>
+        </p:txBody>
+      </p:sp>
+      <p:sp>
+        <p:nvSpPr>
+          <p:cNvPr id="3" name="Content Placeholder 2"/>
+          <p:cNvSpPr>
+            <a:spLocks noGrp="1"/>
+          </p:cNvSpPr>
+          <p:nvPr>
+            <p:ph idx="1"/>
+          </p:nvPr>
+        </p:nvSpPr>
+        <p:spPr>
+          <a:xfrm>
+            <a:off x="658368" y="1463040"/>
+            <a:ext cx="10972800" cy="4754880"/>
+          </a:xfrm>
+        </p:spPr>
+        <p:txBody>
+          <a:bodyPr wrap="square">
+            <a:normAutofit/>
+          </a:bodyPr>
+          <a:lstStyle/>
+          <a:p>
+            <a:pPr>
+              <a:spcAft>
+                <a:spcPts val="600"/>
+              </a:spcAft>
+            </a:pPr>
+            <a:r>
+              <a:rPr sz="1500" b="1">
+                <a:solidFill>
+                  <a:srgbClr val="2B6CA3"/>
+                </a:solidFill>
+                <a:latin typeface="Cambria"/>
+              </a:rPr>
+              <a:t>At the plant, edge:</a:t>
+            </a:r>
+          </a:p>
+          <a:p>
+            <a:pPr lvl="1">
+              <a:spcAft>
+                <a:spcPts val="600"/>
+              </a:spcAft>
+            </a:pPr>
+            <a:r>
+              <a:rPr sz="1300" b="0">
+                <a:solidFill>
+                  <a:srgbClr val="232A26"/>
+                </a:solidFill>
+                <a:latin typeface="Cambria"/>
+              </a:rPr>
+              <a:t>Sensors: 10 field sensors across 2 plants.</a:t>
+            </a:r>
+          </a:p>
+          <a:p>
+            <a:pPr lvl="1">
+              <a:spcAft>
+                <a:spcPts val="600"/>
+              </a:spcAft>
+            </a:pPr>
+            <a:r>
+              <a:rPr sz="1300" b="0">
+                <a:solidFill>
+                  <a:srgbClr val="232A26"/>
+                </a:solidFill>
+                <a:latin typeface="Cambria"/>
+              </a:rPr>
+              <a:t>Fog node: 10-second windows, aggregate, alert gates.</a:t>
+            </a:r>
+          </a:p>
+          <a:p>
+            <a:pPr>
+              <a:spcAft>
+                <a:spcPts val="600"/>
+              </a:spcAft>
+            </a:pPr>
+            <a:r>
+              <a:rPr sz="1500" b="1">
+                <a:solidFill>
+                  <a:srgbClr val="2B6CA3"/>
+                </a:solidFill>
+                <a:latin typeface="Cambria"/>
+              </a:rPr>
+              <a:t>AWS cloud:</a:t>
+            </a:r>
+          </a:p>
+          <a:p>
+            <a:pPr lvl="1">
+              <a:spcAft>
+                <a:spcPts val="600"/>
+              </a:spcAft>
+            </a:pPr>
+            <a:r>
+              <a:rPr sz="1300" b="0">
+                <a:solidFill>
+                  <a:srgbClr val="232A26"/>
+                </a:solidFill>
+                <a:latin typeface="Cambria"/>
+              </a:rPr>
+              <a:t>Amazon SQS: one summary per window, batched.</a:t>
+            </a:r>
+          </a:p>
+          <a:p>
+            <a:pPr lvl="1">
+              <a:spcAft>
+                <a:spcPts val="600"/>
+              </a:spcAft>
+            </a:pPr>
+            <a:r>
+              <a:rPr sz="1300" b="0">
+                <a:solidFill>
+                  <a:srgbClr val="232A26"/>
+                </a:solidFill>
+                <a:latin typeface="Cambria"/>
+              </a:rPr>
+              <a:t>AWS Lambda: serverless ingest of each summary.</a:t>
+            </a:r>
+          </a:p>
+          <a:p>
+            <a:pPr lvl="1">
+              <a:spcAft>
+                <a:spcPts val="600"/>
+              </a:spcAft>
+            </a:pPr>
+            <a:r>
+              <a:rPr sz="1300" b="0">
+                <a:solidFill>
+                  <a:srgbClr val="232A26"/>
+                </a:solidFill>
+                <a:latin typeface="Cambria"/>
+              </a:rPr>
+              <a:t>DynamoDB: time-series store of every window.</a:t>
+            </a:r>
+          </a:p>
+          <a:p>
+            <a:pPr lvl="1">
+              <a:spcAft>
+                <a:spcPts val="600"/>
+              </a:spcAft>
+            </a:pPr>
+            <a:r>
+              <a:rPr sz="1300" b="0">
+                <a:solidFill>
+                  <a:srgbClr val="232A26"/>
+                </a:solidFill>
+                <a:latin typeface="Cambria"/>
+              </a:rPr>
+              <a:t>Live dashboard: served via S3 and API Gateway.</a:t>
+            </a:r>
+          </a:p>
+          <a:p>
+            <a:pPr>
+              <a:spcAft>
+                <a:spcPts val="600"/>
+              </a:spcAft>
+            </a:pPr>
+            <a:r>
+              <a:rPr sz="1500" b="0">
+                <a:solidFill>
+                  <a:srgbClr val="232A26"/>
+                </a:solidFill>
+                <a:latin typeface="Cambria"/>
+              </a:rPr>
+              <a:t>Verified end to end locally with Docker and an AWS emulator, and the same AWS SDK code deploys to real AWS in a single scripted step.</a:t>
+            </a:r>
+          </a:p>
+        </p:txBody>
+      </p:sp>
     </p:spTree>
   </p:cSld>
   <p:clrMapOvr>
@@ -4250,7 +3886,7 @@
 </p:sld>
 </file>
 
-<file path=ppt/slides/slide6.xml><?xml version="1.0" encoding="utf-8"?>
+<file path=ppt/slides/slide4.xml><?xml version="1.0" encoding="utf-8"?>
 <p:sld xmlns:a="http://schemas.openxmlformats.org/drawingml/2006/main" xmlns:p="http://schemas.openxmlformats.org/presentationml/2006/main" xmlns:r="http://schemas.openxmlformats.org/officeDocument/2006/relationships">
   <p:cSld>
     <p:spTree>
@@ -4262,150 +3898,14 @@
       <p:grpSpPr/>
       <p:sp>
         <p:nvSpPr>
-          <p:cNvPr id="2" name="Title 1"/>
-          <p:cNvSpPr>
-            <a:spLocks noGrp="1"/>
-          </p:cNvSpPr>
-          <p:nvPr>
-            <p:ph type="title"/>
-          </p:nvPr>
+          <p:cNvPr id="5" name="Rectangle 4"/>
+          <p:cNvSpPr/>
+          <p:nvPr/>
         </p:nvSpPr>
         <p:spPr>
           <a:xfrm>
-            <a:off x="640080" y="384048"/>
-            <a:ext cx="10972800" cy="868680"/>
-          </a:xfrm>
-        </p:spPr>
-        <p:txBody>
-          <a:bodyPr wrap="square" anchor="t"/>
-          <a:lstStyle/>
-          <a:p>
-            <a:pPr algn="l"/>
-            <a:r>
-              <a:rPr b="1" sz="2700">
-                <a:solidFill>
-                  <a:srgbClr val="2B6CA3"/>
-                </a:solidFill>
-                <a:latin typeface="Georgia"/>
-              </a:rPr>
-              <a:t>What to take away</a:t>
-            </a:r>
-          </a:p>
-        </p:txBody>
-      </p:sp>
-      <p:sp>
-        <p:nvSpPr>
-          <p:cNvPr id="3" name="Content Placeholder 2"/>
-          <p:cNvSpPr>
-            <a:spLocks noGrp="1"/>
-          </p:cNvSpPr>
-          <p:nvPr>
-            <p:ph idx="1"/>
-          </p:nvPr>
-        </p:nvSpPr>
-        <p:spPr>
-          <a:xfrm>
-            <a:off x="658368" y="1481328"/>
-            <a:ext cx="10972800" cy="4846320"/>
-          </a:xfrm>
-        </p:spPr>
-        <p:txBody>
-          <a:bodyPr wrap="square">
-            <a:normAutofit/>
-          </a:bodyPr>
-          <a:lstStyle/>
-          <a:p>
-            <a:pPr>
-              <a:spcAft>
-                <a:spcPts val="900"/>
-              </a:spcAft>
-            </a:pPr>
-            <a:r>
-              <a:rPr sz="1700" b="0">
-                <a:solidFill>
-                  <a:srgbClr val="232A26"/>
-                </a:solidFill>
-                <a:latin typeface="Cambria"/>
-              </a:rPr>
-              <a:t>Decide at the edge: alerts fire the moment a 10-second window closes, on site, with no round trip to the cloud before acting.</a:t>
-            </a:r>
-          </a:p>
-          <a:p>
-            <a:pPr>
-              <a:spcAft>
-                <a:spcPts val="900"/>
-              </a:spcAft>
-            </a:pPr>
-            <a:r>
-              <a:rPr sz="1700" b="0">
-                <a:solidFill>
-                  <a:srgbClr val="232A26"/>
-                </a:solidFill>
-                <a:latin typeface="Cambria"/>
-              </a:rPr>
-              <a:t>Ship summaries, not noise: one aggregate per window flows through Amazon SQS, AWS Lambda and DynamoDB, which is lean, cheap and durable.</a:t>
-            </a:r>
-          </a:p>
-          <a:p>
-            <a:pPr>
-              <a:spcAft>
-                <a:spcPts val="900"/>
-              </a:spcAft>
-            </a:pPr>
-            <a:r>
-              <a:rPr sz="1700" b="1">
-                <a:solidFill>
-                  <a:srgbClr val="2B6CA3"/>
-                </a:solidFill>
-                <a:latin typeface="Cambria"/>
-              </a:rPr>
-              <a:t>Proven and portable: 107 tests pass, a 2,000-message burst drains, and one scripted step moves it onto real AWS.</a:t>
-            </a:r>
-          </a:p>
-          <a:p>
-            <a:pPr>
-              <a:spcAft>
-                <a:spcPts val="900"/>
-              </a:spcAft>
-            </a:pPr>
-            <a:r>
-              <a:rPr sz="1700" b="0">
-                <a:solidFill>
-                  <a:srgbClr val="232A26"/>
-                </a:solidFill>
-                <a:latin typeface="Cambria"/>
-              </a:rPr>
-              <a:t>The pipeline runs end to end: intake, sensing, quality gates, cloud store, outflow.</a:t>
-            </a:r>
-          </a:p>
-          <a:p>
-            <a:pPr>
-              <a:spcAft>
-                <a:spcPts val="900"/>
-              </a:spcAft>
-            </a:pPr>
-            <a:r>
-              <a:rPr sz="1700" b="0">
-                <a:solidFill>
-                  <a:srgbClr val="232A26"/>
-                </a:solidFill>
-                <a:latin typeface="Cambria"/>
-              </a:rPr>
-              <a:t>Thank you. Questions?</a:t>
-            </a:r>
-          </a:p>
-        </p:txBody>
-      </p:sp>
-      <p:sp>
-        <p:nvSpPr>
-          <p:cNvPr id="4" name="Rectangle 3"/>
-          <p:cNvSpPr/>
-          <p:nvPr/>
-        </p:nvSpPr>
-        <p:spPr>
-          <a:xfrm>
-            <a:off x="658368" y="1261872"/>
-            <a:ext cx="3108960" cy="36576"/>
+            <a:off x="-91440" y="6693408"/>
+            <a:ext cx="12435840" cy="164592"/>
           </a:xfrm>
           <a:prstGeom prst="rect">
             <a:avLst/>
@@ -4437,6 +3937,726 @@
           <a:lstStyle/>
           <a:p>
             <a:pPr algn="ctr"/>
+          </a:p>
+        </p:txBody>
+      </p:sp>
+      <p:sp>
+        <p:nvSpPr>
+          <p:cNvPr id="4" name="Rectangle 3"/>
+          <p:cNvSpPr/>
+          <p:nvPr/>
+        </p:nvSpPr>
+        <p:spPr>
+          <a:xfrm>
+            <a:off x="-91440" y="0"/>
+            <a:ext cx="12435840" cy="164592"/>
+          </a:xfrm>
+          <a:prstGeom prst="rect">
+            <a:avLst/>
+          </a:prstGeom>
+          <a:solidFill>
+            <a:srgbClr val="2B6CA3"/>
+          </a:solidFill>
+          <a:ln>
+            <a:noFill/>
+          </a:ln>
+          <a:effectLst/>
+        </p:spPr>
+        <p:style>
+          <a:lnRef idx="1">
+            <a:schemeClr val="accent1"/>
+          </a:lnRef>
+          <a:fillRef idx="3">
+            <a:schemeClr val="accent1"/>
+          </a:fillRef>
+          <a:effectRef idx="2">
+            <a:schemeClr val="accent1"/>
+          </a:effectRef>
+          <a:fontRef idx="minor">
+            <a:schemeClr val="lt1"/>
+          </a:fontRef>
+        </p:style>
+        <p:txBody>
+          <a:bodyPr rtlCol="0" anchor="ctr"/>
+          <a:lstStyle/>
+          <a:p>
+            <a:pPr algn="ctr"/>
+          </a:p>
+        </p:txBody>
+      </p:sp>
+      <p:sp>
+        <p:nvSpPr>
+          <p:cNvPr id="2" name="Title 1"/>
+          <p:cNvSpPr>
+            <a:spLocks noGrp="1"/>
+          </p:cNvSpPr>
+          <p:nvPr>
+            <p:ph type="title"/>
+          </p:nvPr>
+        </p:nvSpPr>
+        <p:spPr>
+          <a:xfrm>
+            <a:off x="640080" y="457200"/>
+            <a:ext cx="10972800" cy="868680"/>
+          </a:xfrm>
+        </p:spPr>
+        <p:txBody>
+          <a:bodyPr wrap="square" anchor="t"/>
+          <a:lstStyle/>
+          <a:p>
+            <a:pPr algn="l"/>
+            <a:r>
+              <a:rPr b="1" sz="2700">
+                <a:solidFill>
+                  <a:srgbClr val="2B6CA3"/>
+                </a:solidFill>
+                <a:latin typeface="Georgia"/>
+              </a:rPr>
+              <a:t>Demonstration highlights</a:t>
+            </a:r>
+          </a:p>
+        </p:txBody>
+      </p:sp>
+      <p:sp>
+        <p:nvSpPr>
+          <p:cNvPr id="3" name="Content Placeholder 2"/>
+          <p:cNvSpPr>
+            <a:spLocks noGrp="1"/>
+          </p:cNvSpPr>
+          <p:nvPr>
+            <p:ph idx="1"/>
+          </p:nvPr>
+        </p:nvSpPr>
+        <p:spPr>
+          <a:xfrm>
+            <a:off x="658368" y="1463040"/>
+            <a:ext cx="5760720" cy="4663440"/>
+          </a:xfrm>
+        </p:spPr>
+        <p:txBody>
+          <a:bodyPr wrap="square">
+            <a:normAutofit/>
+          </a:bodyPr>
+          <a:lstStyle/>
+          <a:p>
+            <a:pPr>
+              <a:spcAft>
+                <a:spcPts val="800"/>
+              </a:spcAft>
+            </a:pPr>
+            <a:r>
+              <a:rPr sz="1500" b="0">
+                <a:solidFill>
+                  <a:srgbClr val="232A26"/>
+                </a:solidFill>
+                <a:latin typeface="Cambria"/>
+              </a:rPr>
+              <a:t>Dashboard during the end-to-end local run: reading-by-plant matrix, compliance strips, cross-plant trends.</a:t>
+            </a:r>
+          </a:p>
+          <a:p>
+            <a:pPr>
+              <a:spcAft>
+                <a:spcPts val="800"/>
+              </a:spcAft>
+            </a:pPr>
+            <a:r>
+              <a:rPr sz="1500" b="0">
+                <a:solidFill>
+                  <a:srgbClr val="232A26"/>
+                </a:solidFill>
+                <a:latin typeface="Cambria"/>
+              </a:rPr>
+              <a:t>4 / 4 pipeline health checks green: gateway, queue, Lambda, and end-to-end pipeline.</a:t>
+            </a:r>
+          </a:p>
+          <a:p>
+            <a:pPr>
+              <a:spcAft>
+                <a:spcPts val="800"/>
+              </a:spcAft>
+            </a:pPr>
+            <a:r>
+              <a:rPr sz="1500" b="0">
+                <a:solidFill>
+                  <a:srgbClr val="232A26"/>
+                </a:solidFill>
+                <a:latin typeface="Cambria"/>
+              </a:rPr>
+              <a:t>107 automated tests pass across sensors, fog, processor and dashboard.</a:t>
+            </a:r>
+          </a:p>
+          <a:p>
+            <a:pPr>
+              <a:spcAft>
+                <a:spcPts val="800"/>
+              </a:spcAft>
+            </a:pPr>
+            <a:r>
+              <a:rPr sz="1500" b="0">
+                <a:solidFill>
+                  <a:srgbClr val="232A26"/>
+                </a:solidFill>
+                <a:latin typeface="Cambria"/>
+              </a:rPr>
+              <a:t>2,000 message burst absorbed by the queue and drained by the consumer.</a:t>
+            </a:r>
+          </a:p>
+        </p:txBody>
+      </p:sp>
+      <p:pic>
+        <p:nvPicPr>
+          <p:cNvPr id="6" name="Picture 5" descr="dashboard-desktop.png"/>
+          <p:cNvPicPr>
+            <a:picLocks noChangeAspect="1"/>
+          </p:cNvPicPr>
+          <p:nvPr/>
+        </p:nvPicPr>
+        <p:blipFill>
+          <a:blip r:embed="rId2"/>
+          <a:stretch>
+            <a:fillRect/>
+          </a:stretch>
+        </p:blipFill>
+        <p:spPr>
+          <a:xfrm>
+            <a:off x="6629400" y="1939671"/>
+            <a:ext cx="5120640" cy="3600449"/>
+          </a:xfrm>
+          <a:prstGeom prst="rect">
+            <a:avLst/>
+          </a:prstGeom>
+        </p:spPr>
+      </p:pic>
+    </p:spTree>
+  </p:cSld>
+  <p:clrMapOvr>
+    <a:masterClrMapping/>
+  </p:clrMapOvr>
+</p:sld>
+</file>
+
+<file path=ppt/slides/slide5.xml><?xml version="1.0" encoding="utf-8"?>
+<p:sld xmlns:a="http://schemas.openxmlformats.org/drawingml/2006/main" xmlns:p="http://schemas.openxmlformats.org/presentationml/2006/main" xmlns:r="http://schemas.openxmlformats.org/officeDocument/2006/relationships">
+  <p:cSld>
+    <p:spTree>
+      <p:nvGrpSpPr>
+        <p:cNvPr id="1" name=""/>
+        <p:cNvGrpSpPr/>
+        <p:nvPr/>
+      </p:nvGrpSpPr>
+      <p:grpSpPr/>
+      <p:sp>
+        <p:nvSpPr>
+          <p:cNvPr id="5" name="Rectangle 4"/>
+          <p:cNvSpPr/>
+          <p:nvPr/>
+        </p:nvSpPr>
+        <p:spPr>
+          <a:xfrm>
+            <a:off x="-91440" y="6693408"/>
+            <a:ext cx="12435840" cy="164592"/>
+          </a:xfrm>
+          <a:prstGeom prst="rect">
+            <a:avLst/>
+          </a:prstGeom>
+          <a:solidFill>
+            <a:srgbClr val="2B6CA3"/>
+          </a:solidFill>
+          <a:ln>
+            <a:noFill/>
+          </a:ln>
+          <a:effectLst/>
+        </p:spPr>
+        <p:style>
+          <a:lnRef idx="1">
+            <a:schemeClr val="accent1"/>
+          </a:lnRef>
+          <a:fillRef idx="3">
+            <a:schemeClr val="accent1"/>
+          </a:fillRef>
+          <a:effectRef idx="2">
+            <a:schemeClr val="accent1"/>
+          </a:effectRef>
+          <a:fontRef idx="minor">
+            <a:schemeClr val="lt1"/>
+          </a:fontRef>
+        </p:style>
+        <p:txBody>
+          <a:bodyPr rtlCol="0" anchor="ctr"/>
+          <a:lstStyle/>
+          <a:p>
+            <a:pPr algn="ctr"/>
+          </a:p>
+        </p:txBody>
+      </p:sp>
+      <p:sp>
+        <p:nvSpPr>
+          <p:cNvPr id="4" name="Rectangle 3"/>
+          <p:cNvSpPr/>
+          <p:nvPr/>
+        </p:nvSpPr>
+        <p:spPr>
+          <a:xfrm>
+            <a:off x="-91440" y="0"/>
+            <a:ext cx="12435840" cy="164592"/>
+          </a:xfrm>
+          <a:prstGeom prst="rect">
+            <a:avLst/>
+          </a:prstGeom>
+          <a:solidFill>
+            <a:srgbClr val="2B6CA3"/>
+          </a:solidFill>
+          <a:ln>
+            <a:noFill/>
+          </a:ln>
+          <a:effectLst/>
+        </p:spPr>
+        <p:style>
+          <a:lnRef idx="1">
+            <a:schemeClr val="accent1"/>
+          </a:lnRef>
+          <a:fillRef idx="3">
+            <a:schemeClr val="accent1"/>
+          </a:fillRef>
+          <a:effectRef idx="2">
+            <a:schemeClr val="accent1"/>
+          </a:effectRef>
+          <a:fontRef idx="minor">
+            <a:schemeClr val="lt1"/>
+          </a:fontRef>
+        </p:style>
+        <p:txBody>
+          <a:bodyPr rtlCol="0" anchor="ctr"/>
+          <a:lstStyle/>
+          <a:p>
+            <a:pPr algn="ctr"/>
+          </a:p>
+        </p:txBody>
+      </p:sp>
+      <p:sp>
+        <p:nvSpPr>
+          <p:cNvPr id="2" name="Title 1"/>
+          <p:cNvSpPr>
+            <a:spLocks noGrp="1"/>
+          </p:cNvSpPr>
+          <p:nvPr>
+            <p:ph type="title"/>
+          </p:nvPr>
+        </p:nvSpPr>
+        <p:spPr>
+          <a:xfrm>
+            <a:off x="640080" y="457200"/>
+            <a:ext cx="10972800" cy="868680"/>
+          </a:xfrm>
+        </p:spPr>
+        <p:txBody>
+          <a:bodyPr wrap="square" anchor="t"/>
+          <a:lstStyle/>
+          <a:p>
+            <a:pPr algn="l"/>
+            <a:r>
+              <a:rPr b="1" sz="2700">
+                <a:solidFill>
+                  <a:srgbClr val="2B6CA3"/>
+                </a:solidFill>
+                <a:latin typeface="Georgia"/>
+              </a:rPr>
+              <a:t>The hardest part: burst survival</a:t>
+            </a:r>
+          </a:p>
+        </p:txBody>
+      </p:sp>
+      <p:sp>
+        <p:nvSpPr>
+          <p:cNvPr id="3" name="Content Placeholder 2"/>
+          <p:cNvSpPr>
+            <a:spLocks noGrp="1"/>
+          </p:cNvSpPr>
+          <p:nvPr>
+            <p:ph idx="1"/>
+          </p:nvPr>
+        </p:nvSpPr>
+        <p:spPr>
+          <a:xfrm>
+            <a:off x="658368" y="1463040"/>
+            <a:ext cx="10972800" cy="4754880"/>
+          </a:xfrm>
+        </p:spPr>
+        <p:txBody>
+          <a:bodyPr wrap="square">
+            <a:normAutofit/>
+          </a:bodyPr>
+          <a:lstStyle/>
+          <a:p>
+            <a:pPr>
+              <a:spcAft>
+                <a:spcPts val="600"/>
+              </a:spcAft>
+            </a:pPr>
+            <a:r>
+              <a:rPr sz="1500" b="1">
+                <a:solidFill>
+                  <a:srgbClr val="2B6CA3"/>
+                </a:solidFill>
+                <a:latin typeface="Cambria"/>
+              </a:rPr>
+              <a:t>The problem:</a:t>
+            </a:r>
+          </a:p>
+          <a:p>
+            <a:pPr lvl="1">
+              <a:spcAft>
+                <a:spcPts val="600"/>
+              </a:spcAft>
+            </a:pPr>
+            <a:r>
+              <a:rPr sz="1300" b="0">
+                <a:solidFill>
+                  <a:srgbClr val="232A26"/>
+                </a:solidFill>
+                <a:latin typeface="Cambria"/>
+              </a:rPr>
+              <a:t>Normal traffic is one summary every ten seconds. To claim scalability we fired 2,000 messages at the queue from 32 parallel workers, orders of magnitude above normal load.</a:t>
+            </a:r>
+          </a:p>
+          <a:p>
+            <a:pPr>
+              <a:spcAft>
+                <a:spcPts val="600"/>
+              </a:spcAft>
+            </a:pPr>
+            <a:r>
+              <a:rPr sz="1500" b="1">
+                <a:solidFill>
+                  <a:srgbClr val="2B6CA3"/>
+                </a:solidFill>
+                <a:latin typeface="Cambria"/>
+              </a:rPr>
+              <a:t>Why it was hard:</a:t>
+            </a:r>
+          </a:p>
+          <a:p>
+            <a:pPr lvl="1">
+              <a:spcAft>
+                <a:spcPts val="600"/>
+              </a:spcAft>
+            </a:pPr>
+            <a:r>
+              <a:rPr sz="1300" b="0">
+                <a:solidFill>
+                  <a:srgbClr val="232A26"/>
+                </a:solidFill>
+                <a:latin typeface="Cambria"/>
+              </a:rPr>
+              <a:t>From outside, a non-empty queue is ambiguous: a slow consumer and a dead one look identical. The emulator runs the Lambda in a single container, so drain time swings wildly, and a naive pass/fail test either flakes or lies.</a:t>
+            </a:r>
+          </a:p>
+          <a:p>
+            <a:pPr>
+              <a:spcAft>
+                <a:spcPts val="600"/>
+              </a:spcAft>
+            </a:pPr>
+            <a:r>
+              <a:rPr sz="1500" b="1">
+                <a:solidFill>
+                  <a:srgbClr val="2B6CA3"/>
+                </a:solidFill>
+                <a:latin typeface="Cambria"/>
+              </a:rPr>
+              <a:t>The fix:</a:t>
+            </a:r>
+          </a:p>
+          <a:p>
+            <a:pPr lvl="1">
+              <a:spcAft>
+                <a:spcPts val="600"/>
+              </a:spcAft>
+            </a:pPr>
+            <a:r>
+              <a:rPr sz="1300" b="0">
+                <a:solidFill>
+                  <a:srgbClr val="232A26"/>
+                </a:solidFill>
+                <a:latin typeface="Cambria"/>
+              </a:rPr>
+              <a:t>A two-tier check: first assert the queue really absorbed the burst, then require either a full drain in time or a backlog strictly below the post-burst peak. Decreasing numbers prove the consumer is alive and working, not stalled.</a:t>
+            </a:r>
+          </a:p>
+          <a:p>
+            <a:pPr>
+              <a:spcAft>
+                <a:spcPts val="600"/>
+              </a:spcAft>
+            </a:pPr>
+            <a:r>
+              <a:rPr sz="1500" b="0">
+                <a:solidFill>
+                  <a:srgbClr val="232A26"/>
+                </a:solidFill>
+                <a:latin typeface="Cambria"/>
+              </a:rPr>
+              <a:t>Queue backlog over the test: 2,000 after send, falling mid-test, 0 drained.</a:t>
+            </a:r>
+          </a:p>
+          <a:p>
+            <a:pPr>
+              <a:spcAft>
+                <a:spcPts val="600"/>
+              </a:spcAft>
+            </a:pPr>
+            <a:r>
+              <a:rPr sz="1500" b="0">
+                <a:solidFill>
+                  <a:srgbClr val="232A26"/>
+                </a:solidFill>
+                <a:latin typeface="Cambria"/>
+              </a:rPr>
+              <a:t>Strictly decreasing backlog means real progress, not a stall.</a:t>
+            </a:r>
+          </a:p>
+        </p:txBody>
+      </p:sp>
+    </p:spTree>
+  </p:cSld>
+  <p:clrMapOvr>
+    <a:masterClrMapping/>
+  </p:clrMapOvr>
+</p:sld>
+</file>
+
+<file path=ppt/slides/slide6.xml><?xml version="1.0" encoding="utf-8"?>
+<p:sld xmlns:a="http://schemas.openxmlformats.org/drawingml/2006/main" xmlns:p="http://schemas.openxmlformats.org/presentationml/2006/main" xmlns:r="http://schemas.openxmlformats.org/officeDocument/2006/relationships">
+  <p:cSld>
+    <p:spTree>
+      <p:nvGrpSpPr>
+        <p:cNvPr id="1" name=""/>
+        <p:cNvGrpSpPr/>
+        <p:nvPr/>
+      </p:nvGrpSpPr>
+      <p:grpSpPr/>
+      <p:sp>
+        <p:nvSpPr>
+          <p:cNvPr id="5" name="Rectangle 4"/>
+          <p:cNvSpPr/>
+          <p:nvPr/>
+        </p:nvSpPr>
+        <p:spPr>
+          <a:xfrm>
+            <a:off x="-91440" y="6693408"/>
+            <a:ext cx="12435840" cy="164592"/>
+          </a:xfrm>
+          <a:prstGeom prst="rect">
+            <a:avLst/>
+          </a:prstGeom>
+          <a:solidFill>
+            <a:srgbClr val="2B6CA3"/>
+          </a:solidFill>
+          <a:ln>
+            <a:noFill/>
+          </a:ln>
+          <a:effectLst/>
+        </p:spPr>
+        <p:style>
+          <a:lnRef idx="1">
+            <a:schemeClr val="accent1"/>
+          </a:lnRef>
+          <a:fillRef idx="3">
+            <a:schemeClr val="accent1"/>
+          </a:fillRef>
+          <a:effectRef idx="2">
+            <a:schemeClr val="accent1"/>
+          </a:effectRef>
+          <a:fontRef idx="minor">
+            <a:schemeClr val="lt1"/>
+          </a:fontRef>
+        </p:style>
+        <p:txBody>
+          <a:bodyPr rtlCol="0" anchor="ctr"/>
+          <a:lstStyle/>
+          <a:p>
+            <a:pPr algn="ctr"/>
+          </a:p>
+        </p:txBody>
+      </p:sp>
+      <p:sp>
+        <p:nvSpPr>
+          <p:cNvPr id="4" name="Rectangle 3"/>
+          <p:cNvSpPr/>
+          <p:nvPr/>
+        </p:nvSpPr>
+        <p:spPr>
+          <a:xfrm>
+            <a:off x="-91440" y="0"/>
+            <a:ext cx="12435840" cy="164592"/>
+          </a:xfrm>
+          <a:prstGeom prst="rect">
+            <a:avLst/>
+          </a:prstGeom>
+          <a:solidFill>
+            <a:srgbClr val="2B6CA3"/>
+          </a:solidFill>
+          <a:ln>
+            <a:noFill/>
+          </a:ln>
+          <a:effectLst/>
+        </p:spPr>
+        <p:style>
+          <a:lnRef idx="1">
+            <a:schemeClr val="accent1"/>
+          </a:lnRef>
+          <a:fillRef idx="3">
+            <a:schemeClr val="accent1"/>
+          </a:fillRef>
+          <a:effectRef idx="2">
+            <a:schemeClr val="accent1"/>
+          </a:effectRef>
+          <a:fontRef idx="minor">
+            <a:schemeClr val="lt1"/>
+          </a:fontRef>
+        </p:style>
+        <p:txBody>
+          <a:bodyPr rtlCol="0" anchor="ctr"/>
+          <a:lstStyle/>
+          <a:p>
+            <a:pPr algn="ctr"/>
+          </a:p>
+        </p:txBody>
+      </p:sp>
+      <p:sp>
+        <p:nvSpPr>
+          <p:cNvPr id="2" name="Title 1"/>
+          <p:cNvSpPr>
+            <a:spLocks noGrp="1"/>
+          </p:cNvSpPr>
+          <p:nvPr>
+            <p:ph type="title"/>
+          </p:nvPr>
+        </p:nvSpPr>
+        <p:spPr>
+          <a:xfrm>
+            <a:off x="640080" y="457200"/>
+            <a:ext cx="10972800" cy="868680"/>
+          </a:xfrm>
+        </p:spPr>
+        <p:txBody>
+          <a:bodyPr wrap="square" anchor="t"/>
+          <a:lstStyle/>
+          <a:p>
+            <a:pPr algn="l"/>
+            <a:r>
+              <a:rPr b="1" sz="2700">
+                <a:solidFill>
+                  <a:srgbClr val="2B6CA3"/>
+                </a:solidFill>
+                <a:latin typeface="Georgia"/>
+              </a:rPr>
+              <a:t>What to take away</a:t>
+            </a:r>
+          </a:p>
+        </p:txBody>
+      </p:sp>
+      <p:sp>
+        <p:nvSpPr>
+          <p:cNvPr id="3" name="Content Placeholder 2"/>
+          <p:cNvSpPr>
+            <a:spLocks noGrp="1"/>
+          </p:cNvSpPr>
+          <p:nvPr>
+            <p:ph idx="1"/>
+          </p:nvPr>
+        </p:nvSpPr>
+        <p:spPr>
+          <a:xfrm>
+            <a:off x="658368" y="1463040"/>
+            <a:ext cx="10972800" cy="4754880"/>
+          </a:xfrm>
+        </p:spPr>
+        <p:txBody>
+          <a:bodyPr wrap="square">
+            <a:normAutofit/>
+          </a:bodyPr>
+          <a:lstStyle/>
+          <a:p>
+            <a:pPr>
+              <a:spcAft>
+                <a:spcPts val="900"/>
+              </a:spcAft>
+            </a:pPr>
+            <a:r>
+              <a:rPr sz="1700" b="0">
+                <a:solidFill>
+                  <a:srgbClr val="232A26"/>
+                </a:solidFill>
+                <a:latin typeface="Cambria"/>
+              </a:rPr>
+              <a:t>Decide at the edge: alerts fire the moment a 10-second window closes, on site, with no round trip to the cloud before acting.</a:t>
+            </a:r>
+          </a:p>
+          <a:p>
+            <a:pPr>
+              <a:spcAft>
+                <a:spcPts val="900"/>
+              </a:spcAft>
+            </a:pPr>
+            <a:r>
+              <a:rPr sz="1700" b="0">
+                <a:solidFill>
+                  <a:srgbClr val="232A26"/>
+                </a:solidFill>
+                <a:latin typeface="Cambria"/>
+              </a:rPr>
+              <a:t>Ship summaries, not noise: one aggregate per window flows through Amazon SQS, AWS Lambda and DynamoDB, which is lean, cheap and durable.</a:t>
+            </a:r>
+          </a:p>
+          <a:p>
+            <a:pPr>
+              <a:spcAft>
+                <a:spcPts val="900"/>
+              </a:spcAft>
+            </a:pPr>
+            <a:r>
+              <a:rPr sz="1700" b="1">
+                <a:solidFill>
+                  <a:srgbClr val="2B6CA3"/>
+                </a:solidFill>
+                <a:latin typeface="Cambria"/>
+              </a:rPr>
+              <a:t>Proven and portable: 107 tests pass, a 2,000-message burst drains, and one scripted step moves it onto real AWS.</a:t>
+            </a:r>
+          </a:p>
+          <a:p>
+            <a:pPr>
+              <a:spcAft>
+                <a:spcPts val="900"/>
+              </a:spcAft>
+            </a:pPr>
+            <a:r>
+              <a:rPr sz="1700" b="0">
+                <a:solidFill>
+                  <a:srgbClr val="232A26"/>
+                </a:solidFill>
+                <a:latin typeface="Cambria"/>
+              </a:rPr>
+              <a:t>The pipeline runs end to end: intake, sensing, quality gates, cloud store, outflow.</a:t>
+            </a:r>
+          </a:p>
+          <a:p>
+            <a:pPr>
+              <a:spcAft>
+                <a:spcPts val="900"/>
+              </a:spcAft>
+            </a:pPr>
+            <a:r>
+              <a:rPr sz="1700" b="0">
+                <a:solidFill>
+                  <a:srgbClr val="232A26"/>
+                </a:solidFill>
+                <a:latin typeface="Cambria"/>
+              </a:rPr>
+              <a:t>Thank you. Questions?</a:t>
+            </a:r>
           </a:p>
         </p:txBody>
       </p:sp>
